--- a/docs/plots/grant/jx_grant_linsubhr_diff_throm3.pptx
+++ b/docs/plots/grant/jx_grant_linsubhr_diff_throm3.pptx
@@ -2271,7 +2271,7 @@
           </p:nvSpPr>
           <p:spPr>
             <a:xfrm>
-              <a:off x="915645" y="5038294"/>
+              <a:off x="915645" y="5067975"/>
               <a:ext cx="7682587" cy="0"/>
             </a:xfrm>
             <a:custGeom>
@@ -2314,7 +2314,7 @@
           </p:nvSpPr>
           <p:spPr>
             <a:xfrm>
-              <a:off x="915645" y="4273666"/>
+              <a:off x="915645" y="4288924"/>
               <a:ext cx="7682587" cy="0"/>
             </a:xfrm>
             <a:custGeom>
@@ -2357,7 +2357,7 @@
           </p:nvSpPr>
           <p:spPr>
             <a:xfrm>
-              <a:off x="915645" y="3509037"/>
+              <a:off x="915645" y="3509873"/>
               <a:ext cx="7682587" cy="0"/>
             </a:xfrm>
             <a:custGeom>
@@ -2400,7 +2400,7 @@
           </p:nvSpPr>
           <p:spPr>
             <a:xfrm>
-              <a:off x="915645" y="2744409"/>
+              <a:off x="915645" y="2730822"/>
               <a:ext cx="7682587" cy="0"/>
             </a:xfrm>
             <a:custGeom>
@@ -2443,15 +2443,15 @@
           </p:nvSpPr>
           <p:spPr>
             <a:xfrm>
-              <a:off x="1701364" y="2209169"/>
-              <a:ext cx="0" cy="3364365"/>
+              <a:off x="1264853" y="2185486"/>
+              <a:ext cx="0" cy="3427824"/>
             </a:xfrm>
             <a:custGeom>
               <a:avLst/>
               <a:pathLst>
-                <a:path w="0" h="3364365">
+                <a:path w="0" h="3427824">
                   <a:moveTo>
-                    <a:pt x="0" y="3364365"/>
+                    <a:pt x="0" y="3427824"/>
                   </a:moveTo>
                   <a:lnTo>
                     <a:pt x="0" y="0"/>
@@ -2486,15 +2486,15 @@
           </p:nvSpPr>
           <p:spPr>
             <a:xfrm>
-              <a:off x="3447406" y="2209169"/>
-              <a:ext cx="0" cy="3364365"/>
+              <a:off x="2137874" y="2185486"/>
+              <a:ext cx="0" cy="3427824"/>
             </a:xfrm>
             <a:custGeom>
               <a:avLst/>
               <a:pathLst>
-                <a:path w="0" h="3364365">
+                <a:path w="0" h="3427824">
                   <a:moveTo>
-                    <a:pt x="0" y="3364365"/>
+                    <a:pt x="0" y="3427824"/>
                   </a:moveTo>
                   <a:lnTo>
                     <a:pt x="0" y="0"/>
@@ -2529,15 +2529,15 @@
           </p:nvSpPr>
           <p:spPr>
             <a:xfrm>
-              <a:off x="5193449" y="2209169"/>
-              <a:ext cx="0" cy="3364365"/>
+              <a:off x="3010896" y="2185486"/>
+              <a:ext cx="0" cy="3427824"/>
             </a:xfrm>
             <a:custGeom>
               <a:avLst/>
               <a:pathLst>
-                <a:path w="0" h="3364365">
+                <a:path w="0" h="3427824">
                   <a:moveTo>
-                    <a:pt x="0" y="3364365"/>
+                    <a:pt x="0" y="3427824"/>
                   </a:moveTo>
                   <a:lnTo>
                     <a:pt x="0" y="0"/>
@@ -2572,15 +2572,15 @@
           </p:nvSpPr>
           <p:spPr>
             <a:xfrm>
-              <a:off x="6939491" y="2209169"/>
-              <a:ext cx="0" cy="3364365"/>
+              <a:off x="3883917" y="2185486"/>
+              <a:ext cx="0" cy="3427824"/>
             </a:xfrm>
             <a:custGeom>
               <a:avLst/>
               <a:pathLst>
-                <a:path w="0" h="3364365">
+                <a:path w="0" h="3427824">
                   <a:moveTo>
-                    <a:pt x="0" y="3364365"/>
+                    <a:pt x="0" y="3427824"/>
                   </a:moveTo>
                   <a:lnTo>
                     <a:pt x="0" y="0"/>
@@ -2615,26 +2615,26 @@
           </p:nvSpPr>
           <p:spPr>
             <a:xfrm>
-              <a:off x="915645" y="5420609"/>
-              <a:ext cx="7682587" cy="0"/>
+              <a:off x="4756938" y="2185486"/>
+              <a:ext cx="0" cy="3427824"/>
             </a:xfrm>
             <a:custGeom>
               <a:avLst/>
               <a:pathLst>
-                <a:path w="7682587" h="0">
+                <a:path w="0" h="3427824">
                   <a:moveTo>
+                    <a:pt x="0" y="3427824"/>
+                  </a:moveTo>
+                  <a:lnTo>
                     <a:pt x="0" y="0"/>
-                  </a:moveTo>
-                  <a:lnTo>
-                    <a:pt x="7682587" y="0"/>
-                  </a:lnTo>
-                  <a:lnTo>
-                    <a:pt x="7682587" y="0"/>
+                  </a:lnTo>
+                  <a:lnTo>
+                    <a:pt x="0" y="0"/>
                   </a:lnTo>
                 </a:path>
               </a:pathLst>
             </a:custGeom>
-            <a:ln w="17246" cap="flat">
+            <a:ln w="8623" cap="flat">
               <a:solidFill>
                 <a:srgbClr val="EBEBEB">
                   <a:alpha val="100000"/>
@@ -2658,26 +2658,26 @@
           </p:nvSpPr>
           <p:spPr>
             <a:xfrm>
-              <a:off x="915645" y="4655980"/>
-              <a:ext cx="7682587" cy="0"/>
+              <a:off x="5629959" y="2185486"/>
+              <a:ext cx="0" cy="3427824"/>
             </a:xfrm>
             <a:custGeom>
               <a:avLst/>
               <a:pathLst>
-                <a:path w="7682587" h="0">
+                <a:path w="0" h="3427824">
                   <a:moveTo>
+                    <a:pt x="0" y="3427824"/>
+                  </a:moveTo>
+                  <a:lnTo>
                     <a:pt x="0" y="0"/>
-                  </a:moveTo>
-                  <a:lnTo>
-                    <a:pt x="7682587" y="0"/>
-                  </a:lnTo>
-                  <a:lnTo>
-                    <a:pt x="7682587" y="0"/>
+                  </a:lnTo>
+                  <a:lnTo>
+                    <a:pt x="0" y="0"/>
                   </a:lnTo>
                 </a:path>
               </a:pathLst>
             </a:custGeom>
-            <a:ln w="17246" cap="flat">
+            <a:ln w="8623" cap="flat">
               <a:solidFill>
                 <a:srgbClr val="EBEBEB">
                   <a:alpha val="100000"/>
@@ -2701,26 +2701,26 @@
           </p:nvSpPr>
           <p:spPr>
             <a:xfrm>
-              <a:off x="915645" y="3891352"/>
-              <a:ext cx="7682587" cy="0"/>
+              <a:off x="6502981" y="2185486"/>
+              <a:ext cx="0" cy="3427824"/>
             </a:xfrm>
             <a:custGeom>
               <a:avLst/>
               <a:pathLst>
-                <a:path w="7682587" h="0">
+                <a:path w="0" h="3427824">
                   <a:moveTo>
+                    <a:pt x="0" y="3427824"/>
+                  </a:moveTo>
+                  <a:lnTo>
                     <a:pt x="0" y="0"/>
-                  </a:moveTo>
-                  <a:lnTo>
-                    <a:pt x="7682587" y="0"/>
-                  </a:lnTo>
-                  <a:lnTo>
-                    <a:pt x="7682587" y="0"/>
+                  </a:lnTo>
+                  <a:lnTo>
+                    <a:pt x="0" y="0"/>
                   </a:lnTo>
                 </a:path>
               </a:pathLst>
             </a:custGeom>
-            <a:ln w="17246" cap="flat">
+            <a:ln w="8623" cap="flat">
               <a:solidFill>
                 <a:srgbClr val="EBEBEB">
                   <a:alpha val="100000"/>
@@ -2744,26 +2744,26 @@
           </p:nvSpPr>
           <p:spPr>
             <a:xfrm>
-              <a:off x="915645" y="3126723"/>
-              <a:ext cx="7682587" cy="0"/>
+              <a:off x="7376002" y="2185486"/>
+              <a:ext cx="0" cy="3427824"/>
             </a:xfrm>
             <a:custGeom>
               <a:avLst/>
               <a:pathLst>
-                <a:path w="7682587" h="0">
+                <a:path w="0" h="3427824">
                   <a:moveTo>
+                    <a:pt x="0" y="3427824"/>
+                  </a:moveTo>
+                  <a:lnTo>
                     <a:pt x="0" y="0"/>
-                  </a:moveTo>
-                  <a:lnTo>
-                    <a:pt x="7682587" y="0"/>
-                  </a:lnTo>
-                  <a:lnTo>
-                    <a:pt x="7682587" y="0"/>
+                  </a:lnTo>
+                  <a:lnTo>
+                    <a:pt x="0" y="0"/>
                   </a:lnTo>
                 </a:path>
               </a:pathLst>
             </a:custGeom>
-            <a:ln w="17246" cap="flat">
+            <a:ln w="8623" cap="flat">
               <a:solidFill>
                 <a:srgbClr val="EBEBEB">
                   <a:alpha val="100000"/>
@@ -2787,26 +2787,26 @@
           </p:nvSpPr>
           <p:spPr>
             <a:xfrm>
-              <a:off x="915645" y="2362095"/>
-              <a:ext cx="7682587" cy="0"/>
+              <a:off x="8249023" y="2185486"/>
+              <a:ext cx="0" cy="3427824"/>
             </a:xfrm>
             <a:custGeom>
               <a:avLst/>
               <a:pathLst>
-                <a:path w="7682587" h="0">
+                <a:path w="0" h="3427824">
                   <a:moveTo>
+                    <a:pt x="0" y="3427824"/>
+                  </a:moveTo>
+                  <a:lnTo>
                     <a:pt x="0" y="0"/>
-                  </a:moveTo>
-                  <a:lnTo>
-                    <a:pt x="7682587" y="0"/>
-                  </a:lnTo>
-                  <a:lnTo>
-                    <a:pt x="7682587" y="0"/>
+                  </a:lnTo>
+                  <a:lnTo>
+                    <a:pt x="0" y="0"/>
                   </a:lnTo>
                 </a:path>
               </a:pathLst>
             </a:custGeom>
-            <a:ln w="17246" cap="flat">
+            <a:ln w="8623" cap="flat">
               <a:solidFill>
                 <a:srgbClr val="EBEBEB">
                   <a:alpha val="100000"/>
@@ -2830,21 +2830,21 @@
           </p:nvSpPr>
           <p:spPr>
             <a:xfrm>
-              <a:off x="2574385" y="2209169"/>
-              <a:ext cx="0" cy="3364365"/>
+              <a:off x="915645" y="5457500"/>
+              <a:ext cx="7682587" cy="0"/>
             </a:xfrm>
             <a:custGeom>
               <a:avLst/>
               <a:pathLst>
-                <a:path w="0" h="3364365">
+                <a:path w="7682587" h="0">
                   <a:moveTo>
-                    <a:pt x="0" y="3364365"/>
+                    <a:pt x="0" y="0"/>
                   </a:moveTo>
                   <a:lnTo>
-                    <a:pt x="0" y="0"/>
-                  </a:lnTo>
-                  <a:lnTo>
-                    <a:pt x="0" y="0"/>
+                    <a:pt x="7682587" y="0"/>
+                  </a:lnTo>
+                  <a:lnTo>
+                    <a:pt x="7682587" y="0"/>
                   </a:lnTo>
                 </a:path>
               </a:pathLst>
@@ -2873,21 +2873,21 @@
           </p:nvSpPr>
           <p:spPr>
             <a:xfrm>
-              <a:off x="4320427" y="2209169"/>
-              <a:ext cx="0" cy="3364365"/>
+              <a:off x="915645" y="4678449"/>
+              <a:ext cx="7682587" cy="0"/>
             </a:xfrm>
             <a:custGeom>
               <a:avLst/>
               <a:pathLst>
-                <a:path w="0" h="3364365">
+                <a:path w="7682587" h="0">
                   <a:moveTo>
-                    <a:pt x="0" y="3364365"/>
+                    <a:pt x="0" y="0"/>
                   </a:moveTo>
                   <a:lnTo>
-                    <a:pt x="0" y="0"/>
-                  </a:lnTo>
-                  <a:lnTo>
-                    <a:pt x="0" y="0"/>
+                    <a:pt x="7682587" y="0"/>
+                  </a:lnTo>
+                  <a:lnTo>
+                    <a:pt x="7682587" y="0"/>
                   </a:lnTo>
                 </a:path>
               </a:pathLst>
@@ -2916,21 +2916,21 @@
           </p:nvSpPr>
           <p:spPr>
             <a:xfrm>
-              <a:off x="6066470" y="2209169"/>
-              <a:ext cx="0" cy="3364365"/>
+              <a:off x="915645" y="3899398"/>
+              <a:ext cx="7682587" cy="0"/>
             </a:xfrm>
             <a:custGeom>
               <a:avLst/>
               <a:pathLst>
-                <a:path w="0" h="3364365">
+                <a:path w="7682587" h="0">
                   <a:moveTo>
-                    <a:pt x="0" y="3364365"/>
+                    <a:pt x="0" y="0"/>
                   </a:moveTo>
                   <a:lnTo>
-                    <a:pt x="0" y="0"/>
-                  </a:lnTo>
-                  <a:lnTo>
-                    <a:pt x="0" y="0"/>
+                    <a:pt x="7682587" y="0"/>
+                  </a:lnTo>
+                  <a:lnTo>
+                    <a:pt x="7682587" y="0"/>
                   </a:lnTo>
                 </a:path>
               </a:pathLst>
@@ -2959,21 +2959,21 @@
           </p:nvSpPr>
           <p:spPr>
             <a:xfrm>
-              <a:off x="7812512" y="2209169"/>
-              <a:ext cx="0" cy="3364365"/>
+              <a:off x="915645" y="3120347"/>
+              <a:ext cx="7682587" cy="0"/>
             </a:xfrm>
             <a:custGeom>
               <a:avLst/>
               <a:pathLst>
-                <a:path w="0" h="3364365">
+                <a:path w="7682587" h="0">
                   <a:moveTo>
-                    <a:pt x="0" y="3364365"/>
+                    <a:pt x="0" y="0"/>
                   </a:moveTo>
                   <a:lnTo>
-                    <a:pt x="0" y="0"/>
-                  </a:lnTo>
-                  <a:lnTo>
-                    <a:pt x="0" y="0"/>
+                    <a:pt x="7682587" y="0"/>
+                  </a:lnTo>
+                  <a:lnTo>
+                    <a:pt x="7682587" y="0"/>
                   </a:lnTo>
                 </a:path>
               </a:pathLst>
@@ -2996,498 +2996,885 @@
         </p:sp>
         <p:sp>
           <p:nvSpPr>
-            <p:cNvPr id="21" name="pg21"/>
+            <p:cNvPr id="21" name="pl21"/>
             <p:cNvSpPr/>
             <p:nvPr/>
           </p:nvSpPr>
           <p:spPr>
             <a:xfrm>
-              <a:off x="915645" y="2209169"/>
-              <a:ext cx="7260303" cy="3210640"/>
+              <a:off x="915645" y="2341296"/>
+              <a:ext cx="7682587" cy="0"/>
             </a:xfrm>
             <a:custGeom>
               <a:avLst/>
               <a:pathLst>
-                <a:path w="7260303" h="3210640">
+                <a:path w="7682587" h="0">
+                  <a:moveTo>
+                    <a:pt x="0" y="0"/>
+                  </a:moveTo>
+                  <a:lnTo>
+                    <a:pt x="7682587" y="0"/>
+                  </a:lnTo>
+                  <a:lnTo>
+                    <a:pt x="7682587" y="0"/>
+                  </a:lnTo>
+                </a:path>
+              </a:pathLst>
+            </a:custGeom>
+            <a:ln w="17246" cap="flat">
+              <a:solidFill>
+                <a:srgbClr val="EBEBEB">
+                  <a:alpha val="100000"/>
+                </a:srgbClr>
+              </a:solidFill>
+              <a:prstDash val="solid"/>
+              <a:round/>
+            </a:ln>
+          </p:spPr>
+          <p:txBody>
+            <a:bodyPr/>
+            <a:lstStyle/>
+            <a:p/>
+          </p:txBody>
+        </p:sp>
+        <p:sp>
+          <p:nvSpPr>
+            <p:cNvPr id="22" name="pl22"/>
+            <p:cNvSpPr/>
+            <p:nvPr/>
+          </p:nvSpPr>
+          <p:spPr>
+            <a:xfrm>
+              <a:off x="1701364" y="2185486"/>
+              <a:ext cx="0" cy="3427824"/>
+            </a:xfrm>
+            <a:custGeom>
+              <a:avLst/>
+              <a:pathLst>
+                <a:path w="0" h="3427824">
+                  <a:moveTo>
+                    <a:pt x="0" y="3427824"/>
+                  </a:moveTo>
+                  <a:lnTo>
+                    <a:pt x="0" y="0"/>
+                  </a:lnTo>
+                  <a:lnTo>
+                    <a:pt x="0" y="0"/>
+                  </a:lnTo>
+                </a:path>
+              </a:pathLst>
+            </a:custGeom>
+            <a:ln w="17246" cap="flat">
+              <a:solidFill>
+                <a:srgbClr val="EBEBEB">
+                  <a:alpha val="100000"/>
+                </a:srgbClr>
+              </a:solidFill>
+              <a:prstDash val="solid"/>
+              <a:round/>
+            </a:ln>
+          </p:spPr>
+          <p:txBody>
+            <a:bodyPr/>
+            <a:lstStyle/>
+            <a:p/>
+          </p:txBody>
+        </p:sp>
+        <p:sp>
+          <p:nvSpPr>
+            <p:cNvPr id="23" name="pl23"/>
+            <p:cNvSpPr/>
+            <p:nvPr/>
+          </p:nvSpPr>
+          <p:spPr>
+            <a:xfrm>
+              <a:off x="2574385" y="2185486"/>
+              <a:ext cx="0" cy="3427824"/>
+            </a:xfrm>
+            <a:custGeom>
+              <a:avLst/>
+              <a:pathLst>
+                <a:path w="0" h="3427824">
+                  <a:moveTo>
+                    <a:pt x="0" y="3427824"/>
+                  </a:moveTo>
+                  <a:lnTo>
+                    <a:pt x="0" y="0"/>
+                  </a:lnTo>
+                  <a:lnTo>
+                    <a:pt x="0" y="0"/>
+                  </a:lnTo>
+                </a:path>
+              </a:pathLst>
+            </a:custGeom>
+            <a:ln w="17246" cap="flat">
+              <a:solidFill>
+                <a:srgbClr val="EBEBEB">
+                  <a:alpha val="100000"/>
+                </a:srgbClr>
+              </a:solidFill>
+              <a:prstDash val="solid"/>
+              <a:round/>
+            </a:ln>
+          </p:spPr>
+          <p:txBody>
+            <a:bodyPr/>
+            <a:lstStyle/>
+            <a:p/>
+          </p:txBody>
+        </p:sp>
+        <p:sp>
+          <p:nvSpPr>
+            <p:cNvPr id="24" name="pl24"/>
+            <p:cNvSpPr/>
+            <p:nvPr/>
+          </p:nvSpPr>
+          <p:spPr>
+            <a:xfrm>
+              <a:off x="3447406" y="2185486"/>
+              <a:ext cx="0" cy="3427824"/>
+            </a:xfrm>
+            <a:custGeom>
+              <a:avLst/>
+              <a:pathLst>
+                <a:path w="0" h="3427824">
+                  <a:moveTo>
+                    <a:pt x="0" y="3427824"/>
+                  </a:moveTo>
+                  <a:lnTo>
+                    <a:pt x="0" y="0"/>
+                  </a:lnTo>
+                  <a:lnTo>
+                    <a:pt x="0" y="0"/>
+                  </a:lnTo>
+                </a:path>
+              </a:pathLst>
+            </a:custGeom>
+            <a:ln w="17246" cap="flat">
+              <a:solidFill>
+                <a:srgbClr val="EBEBEB">
+                  <a:alpha val="100000"/>
+                </a:srgbClr>
+              </a:solidFill>
+              <a:prstDash val="solid"/>
+              <a:round/>
+            </a:ln>
+          </p:spPr>
+          <p:txBody>
+            <a:bodyPr/>
+            <a:lstStyle/>
+            <a:p/>
+          </p:txBody>
+        </p:sp>
+        <p:sp>
+          <p:nvSpPr>
+            <p:cNvPr id="25" name="pl25"/>
+            <p:cNvSpPr/>
+            <p:nvPr/>
+          </p:nvSpPr>
+          <p:spPr>
+            <a:xfrm>
+              <a:off x="4320427" y="2185486"/>
+              <a:ext cx="0" cy="3427824"/>
+            </a:xfrm>
+            <a:custGeom>
+              <a:avLst/>
+              <a:pathLst>
+                <a:path w="0" h="3427824">
+                  <a:moveTo>
+                    <a:pt x="0" y="3427824"/>
+                  </a:moveTo>
+                  <a:lnTo>
+                    <a:pt x="0" y="0"/>
+                  </a:lnTo>
+                  <a:lnTo>
+                    <a:pt x="0" y="0"/>
+                  </a:lnTo>
+                </a:path>
+              </a:pathLst>
+            </a:custGeom>
+            <a:ln w="17246" cap="flat">
+              <a:solidFill>
+                <a:srgbClr val="EBEBEB">
+                  <a:alpha val="100000"/>
+                </a:srgbClr>
+              </a:solidFill>
+              <a:prstDash val="solid"/>
+              <a:round/>
+            </a:ln>
+          </p:spPr>
+          <p:txBody>
+            <a:bodyPr/>
+            <a:lstStyle/>
+            <a:p/>
+          </p:txBody>
+        </p:sp>
+        <p:sp>
+          <p:nvSpPr>
+            <p:cNvPr id="26" name="pl26"/>
+            <p:cNvSpPr/>
+            <p:nvPr/>
+          </p:nvSpPr>
+          <p:spPr>
+            <a:xfrm>
+              <a:off x="5193449" y="2185486"/>
+              <a:ext cx="0" cy="3427824"/>
+            </a:xfrm>
+            <a:custGeom>
+              <a:avLst/>
+              <a:pathLst>
+                <a:path w="0" h="3427824">
+                  <a:moveTo>
+                    <a:pt x="0" y="3427824"/>
+                  </a:moveTo>
+                  <a:lnTo>
+                    <a:pt x="0" y="0"/>
+                  </a:lnTo>
+                  <a:lnTo>
+                    <a:pt x="0" y="0"/>
+                  </a:lnTo>
+                </a:path>
+              </a:pathLst>
+            </a:custGeom>
+            <a:ln w="17246" cap="flat">
+              <a:solidFill>
+                <a:srgbClr val="EBEBEB">
+                  <a:alpha val="100000"/>
+                </a:srgbClr>
+              </a:solidFill>
+              <a:prstDash val="solid"/>
+              <a:round/>
+            </a:ln>
+          </p:spPr>
+          <p:txBody>
+            <a:bodyPr/>
+            <a:lstStyle/>
+            <a:p/>
+          </p:txBody>
+        </p:sp>
+        <p:sp>
+          <p:nvSpPr>
+            <p:cNvPr id="27" name="pl27"/>
+            <p:cNvSpPr/>
+            <p:nvPr/>
+          </p:nvSpPr>
+          <p:spPr>
+            <a:xfrm>
+              <a:off x="6066470" y="2185486"/>
+              <a:ext cx="0" cy="3427824"/>
+            </a:xfrm>
+            <a:custGeom>
+              <a:avLst/>
+              <a:pathLst>
+                <a:path w="0" h="3427824">
+                  <a:moveTo>
+                    <a:pt x="0" y="3427824"/>
+                  </a:moveTo>
+                  <a:lnTo>
+                    <a:pt x="0" y="0"/>
+                  </a:lnTo>
+                  <a:lnTo>
+                    <a:pt x="0" y="0"/>
+                  </a:lnTo>
+                </a:path>
+              </a:pathLst>
+            </a:custGeom>
+            <a:ln w="17246" cap="flat">
+              <a:solidFill>
+                <a:srgbClr val="EBEBEB">
+                  <a:alpha val="100000"/>
+                </a:srgbClr>
+              </a:solidFill>
+              <a:prstDash val="solid"/>
+              <a:round/>
+            </a:ln>
+          </p:spPr>
+          <p:txBody>
+            <a:bodyPr/>
+            <a:lstStyle/>
+            <a:p/>
+          </p:txBody>
+        </p:sp>
+        <p:sp>
+          <p:nvSpPr>
+            <p:cNvPr id="28" name="pl28"/>
+            <p:cNvSpPr/>
+            <p:nvPr/>
+          </p:nvSpPr>
+          <p:spPr>
+            <a:xfrm>
+              <a:off x="6939491" y="2185486"/>
+              <a:ext cx="0" cy="3427824"/>
+            </a:xfrm>
+            <a:custGeom>
+              <a:avLst/>
+              <a:pathLst>
+                <a:path w="0" h="3427824">
+                  <a:moveTo>
+                    <a:pt x="0" y="3427824"/>
+                  </a:moveTo>
+                  <a:lnTo>
+                    <a:pt x="0" y="0"/>
+                  </a:lnTo>
+                  <a:lnTo>
+                    <a:pt x="0" y="0"/>
+                  </a:lnTo>
+                </a:path>
+              </a:pathLst>
+            </a:custGeom>
+            <a:ln w="17246" cap="flat">
+              <a:solidFill>
+                <a:srgbClr val="EBEBEB">
+                  <a:alpha val="100000"/>
+                </a:srgbClr>
+              </a:solidFill>
+              <a:prstDash val="solid"/>
+              <a:round/>
+            </a:ln>
+          </p:spPr>
+          <p:txBody>
+            <a:bodyPr/>
+            <a:lstStyle/>
+            <a:p/>
+          </p:txBody>
+        </p:sp>
+        <p:sp>
+          <p:nvSpPr>
+            <p:cNvPr id="29" name="pl29"/>
+            <p:cNvSpPr/>
+            <p:nvPr/>
+          </p:nvSpPr>
+          <p:spPr>
+            <a:xfrm>
+              <a:off x="7812512" y="2185486"/>
+              <a:ext cx="0" cy="3427824"/>
+            </a:xfrm>
+            <a:custGeom>
+              <a:avLst/>
+              <a:pathLst>
+                <a:path w="0" h="3427824">
+                  <a:moveTo>
+                    <a:pt x="0" y="3427824"/>
+                  </a:moveTo>
+                  <a:lnTo>
+                    <a:pt x="0" y="0"/>
+                  </a:lnTo>
+                  <a:lnTo>
+                    <a:pt x="0" y="0"/>
+                  </a:lnTo>
+                </a:path>
+              </a:pathLst>
+            </a:custGeom>
+            <a:ln w="17246" cap="flat">
+              <a:solidFill>
+                <a:srgbClr val="EBEBEB">
+                  <a:alpha val="100000"/>
+                </a:srgbClr>
+              </a:solidFill>
+              <a:prstDash val="solid"/>
+              <a:round/>
+            </a:ln>
+          </p:spPr>
+          <p:txBody>
+            <a:bodyPr/>
+            <a:lstStyle/>
+            <a:p/>
+          </p:txBody>
+        </p:sp>
+        <p:sp>
+          <p:nvSpPr>
+            <p:cNvPr id="30" name="pg30"/>
+            <p:cNvSpPr/>
+            <p:nvPr/>
+          </p:nvSpPr>
+          <p:spPr>
+            <a:xfrm>
+              <a:off x="915645" y="2185486"/>
+              <a:ext cx="7260303" cy="3271200"/>
+            </a:xfrm>
+            <a:custGeom>
+              <a:avLst/>
+              <a:pathLst>
+                <a:path w="7260303" h="3271200">
                   <a:moveTo>
                     <a:pt x="2515003" y="0"/>
                   </a:moveTo>
                   <a:lnTo>
-                    <a:pt x="2519260" y="25382"/>
-                  </a:lnTo>
-                  <a:lnTo>
-                    <a:pt x="2595729" y="424196"/>
-                  </a:lnTo>
-                  <a:lnTo>
-                    <a:pt x="2672197" y="773089"/>
-                  </a:lnTo>
-                  <a:lnTo>
-                    <a:pt x="2748666" y="1078309"/>
-                  </a:lnTo>
-                  <a:lnTo>
-                    <a:pt x="2825134" y="1345323"/>
-                  </a:lnTo>
-                  <a:lnTo>
-                    <a:pt x="2901602" y="1578913"/>
-                  </a:lnTo>
-                  <a:lnTo>
-                    <a:pt x="2978071" y="1783264"/>
-                  </a:lnTo>
-                  <a:lnTo>
-                    <a:pt x="3054539" y="1962036"/>
-                  </a:lnTo>
-                  <a:lnTo>
-                    <a:pt x="3131008" y="2118430"/>
-                  </a:lnTo>
-                  <a:lnTo>
-                    <a:pt x="3207476" y="2255247"/>
-                  </a:lnTo>
-                  <a:lnTo>
-                    <a:pt x="3283945" y="2374938"/>
-                  </a:lnTo>
-                  <a:lnTo>
-                    <a:pt x="3360413" y="2452925"/>
-                  </a:lnTo>
-                  <a:lnTo>
-                    <a:pt x="3436881" y="2471253"/>
-                  </a:lnTo>
-                  <a:lnTo>
-                    <a:pt x="3513350" y="2489139"/>
-                  </a:lnTo>
-                  <a:lnTo>
-                    <a:pt x="3589818" y="2506592"/>
-                  </a:lnTo>
-                  <a:lnTo>
-                    <a:pt x="3666287" y="2523624"/>
-                  </a:lnTo>
-                  <a:lnTo>
-                    <a:pt x="3742755" y="2540244"/>
-                  </a:lnTo>
-                  <a:lnTo>
-                    <a:pt x="3819224" y="2556463"/>
-                  </a:lnTo>
-                  <a:lnTo>
-                    <a:pt x="3895692" y="2572289"/>
-                  </a:lnTo>
-                  <a:lnTo>
-                    <a:pt x="3972160" y="2587733"/>
-                  </a:lnTo>
-                  <a:lnTo>
-                    <a:pt x="4048629" y="2602804"/>
-                  </a:lnTo>
-                  <a:lnTo>
-                    <a:pt x="4125097" y="2617511"/>
-                  </a:lnTo>
-                  <a:lnTo>
-                    <a:pt x="4201566" y="2631863"/>
-                  </a:lnTo>
-                  <a:lnTo>
-                    <a:pt x="4278034" y="2645867"/>
-                  </a:lnTo>
-                  <a:lnTo>
-                    <a:pt x="4354503" y="2659534"/>
-                  </a:lnTo>
-                  <a:lnTo>
-                    <a:pt x="4430971" y="2672870"/>
-                  </a:lnTo>
-                  <a:lnTo>
-                    <a:pt x="4507439" y="2685883"/>
-                  </a:lnTo>
-                  <a:lnTo>
-                    <a:pt x="4583908" y="2698583"/>
-                  </a:lnTo>
-                  <a:lnTo>
-                    <a:pt x="4660376" y="2710975"/>
-                  </a:lnTo>
-                  <a:lnTo>
-                    <a:pt x="4736845" y="2723068"/>
-                  </a:lnTo>
-                  <a:lnTo>
-                    <a:pt x="4813313" y="2734869"/>
-                  </a:lnTo>
-                  <a:lnTo>
-                    <a:pt x="4889782" y="2746385"/>
-                  </a:lnTo>
-                  <a:lnTo>
-                    <a:pt x="4966250" y="2757622"/>
-                  </a:lnTo>
-                  <a:lnTo>
-                    <a:pt x="5042719" y="2768588"/>
-                  </a:lnTo>
-                  <a:lnTo>
-                    <a:pt x="5119187" y="2779289"/>
-                  </a:lnTo>
-                  <a:lnTo>
-                    <a:pt x="5195655" y="2789731"/>
-                  </a:lnTo>
-                  <a:lnTo>
-                    <a:pt x="5272124" y="2799921"/>
-                  </a:lnTo>
-                  <a:lnTo>
-                    <a:pt x="5348592" y="2809865"/>
-                  </a:lnTo>
-                  <a:lnTo>
-                    <a:pt x="5425061" y="2819568"/>
-                  </a:lnTo>
-                  <a:lnTo>
-                    <a:pt x="5501529" y="2829037"/>
-                  </a:lnTo>
-                  <a:lnTo>
-                    <a:pt x="5577998" y="2838278"/>
-                  </a:lnTo>
-                  <a:lnTo>
-                    <a:pt x="5654466" y="2847295"/>
-                  </a:lnTo>
-                  <a:lnTo>
-                    <a:pt x="5730934" y="2856094"/>
-                  </a:lnTo>
-                  <a:lnTo>
-                    <a:pt x="5807403" y="2864680"/>
-                  </a:lnTo>
-                  <a:lnTo>
-                    <a:pt x="5883871" y="2873059"/>
-                  </a:lnTo>
-                  <a:lnTo>
-                    <a:pt x="5960340" y="2881235"/>
-                  </a:lnTo>
-                  <a:lnTo>
-                    <a:pt x="6036808" y="2889214"/>
-                  </a:lnTo>
-                  <a:lnTo>
-                    <a:pt x="6113277" y="2897000"/>
-                  </a:lnTo>
-                  <a:lnTo>
-                    <a:pt x="6189745" y="2904598"/>
-                  </a:lnTo>
-                  <a:lnTo>
-                    <a:pt x="6266213" y="2912013"/>
-                  </a:lnTo>
-                  <a:lnTo>
-                    <a:pt x="6342682" y="2919248"/>
-                  </a:lnTo>
-                  <a:lnTo>
-                    <a:pt x="6419150" y="2926308"/>
-                  </a:lnTo>
-                  <a:lnTo>
-                    <a:pt x="6495619" y="2933198"/>
-                  </a:lnTo>
-                  <a:lnTo>
-                    <a:pt x="6572087" y="2939922"/>
-                  </a:lnTo>
-                  <a:lnTo>
-                    <a:pt x="6648556" y="2946482"/>
-                  </a:lnTo>
-                  <a:lnTo>
-                    <a:pt x="6725024" y="2952885"/>
-                  </a:lnTo>
-                  <a:lnTo>
-                    <a:pt x="6801492" y="2959132"/>
-                  </a:lnTo>
-                  <a:lnTo>
-                    <a:pt x="6877961" y="2965229"/>
-                  </a:lnTo>
-                  <a:lnTo>
-                    <a:pt x="6954429" y="2971178"/>
-                  </a:lnTo>
-                  <a:lnTo>
-                    <a:pt x="7030898" y="2976984"/>
-                  </a:lnTo>
-                  <a:lnTo>
-                    <a:pt x="7107366" y="2982649"/>
-                  </a:lnTo>
-                  <a:lnTo>
-                    <a:pt x="7183835" y="2988178"/>
-                  </a:lnTo>
-                  <a:lnTo>
-                    <a:pt x="7260303" y="2993572"/>
-                  </a:lnTo>
-                  <a:lnTo>
-                    <a:pt x="7260303" y="3210640"/>
-                  </a:lnTo>
-                  <a:lnTo>
-                    <a:pt x="7183835" y="3210526"/>
-                  </a:lnTo>
-                  <a:lnTo>
-                    <a:pt x="7107366" y="3210396"/>
-                  </a:lnTo>
-                  <a:lnTo>
-                    <a:pt x="7030898" y="3210246"/>
-                  </a:lnTo>
-                  <a:lnTo>
-                    <a:pt x="6954429" y="3210076"/>
-                  </a:lnTo>
-                  <a:lnTo>
-                    <a:pt x="6877961" y="3209880"/>
-                  </a:lnTo>
-                  <a:lnTo>
-                    <a:pt x="6801492" y="3209657"/>
-                  </a:lnTo>
-                  <a:lnTo>
-                    <a:pt x="6725024" y="3209402"/>
-                  </a:lnTo>
-                  <a:lnTo>
-                    <a:pt x="6648556" y="3209111"/>
-                  </a:lnTo>
-                  <a:lnTo>
-                    <a:pt x="6572087" y="3208778"/>
-                  </a:lnTo>
-                  <a:lnTo>
-                    <a:pt x="6495619" y="3208397"/>
-                  </a:lnTo>
-                  <a:lnTo>
-                    <a:pt x="6419150" y="3207962"/>
-                  </a:lnTo>
-                  <a:lnTo>
-                    <a:pt x="6342682" y="3207464"/>
-                  </a:lnTo>
-                  <a:lnTo>
-                    <a:pt x="6266213" y="3206896"/>
-                  </a:lnTo>
-                  <a:lnTo>
-                    <a:pt x="6189745" y="3206245"/>
-                  </a:lnTo>
-                  <a:lnTo>
-                    <a:pt x="6113277" y="3205502"/>
-                  </a:lnTo>
-                  <a:lnTo>
-                    <a:pt x="6036808" y="3204653"/>
-                  </a:lnTo>
-                  <a:lnTo>
-                    <a:pt x="5960340" y="3203682"/>
-                  </a:lnTo>
-                  <a:lnTo>
-                    <a:pt x="5883871" y="3202572"/>
-                  </a:lnTo>
-                  <a:lnTo>
-                    <a:pt x="5807403" y="3201303"/>
-                  </a:lnTo>
-                  <a:lnTo>
-                    <a:pt x="5730934" y="3199853"/>
-                  </a:lnTo>
-                  <a:lnTo>
-                    <a:pt x="5654466" y="3198195"/>
-                  </a:lnTo>
-                  <a:lnTo>
-                    <a:pt x="5577998" y="3196300"/>
-                  </a:lnTo>
-                  <a:lnTo>
-                    <a:pt x="5501529" y="3194134"/>
-                  </a:lnTo>
-                  <a:lnTo>
-                    <a:pt x="5425061" y="3191658"/>
-                  </a:lnTo>
-                  <a:lnTo>
-                    <a:pt x="5348592" y="3188827"/>
-                  </a:lnTo>
-                  <a:lnTo>
-                    <a:pt x="5272124" y="3185592"/>
-                  </a:lnTo>
-                  <a:lnTo>
-                    <a:pt x="5195655" y="3181893"/>
-                  </a:lnTo>
-                  <a:lnTo>
-                    <a:pt x="5119187" y="3177666"/>
-                  </a:lnTo>
-                  <a:lnTo>
-                    <a:pt x="5042719" y="3172833"/>
-                  </a:lnTo>
-                  <a:lnTo>
-                    <a:pt x="4966250" y="3167309"/>
-                  </a:lnTo>
-                  <a:lnTo>
-                    <a:pt x="4889782" y="3160995"/>
-                  </a:lnTo>
-                  <a:lnTo>
-                    <a:pt x="4813313" y="3153777"/>
-                  </a:lnTo>
-                  <a:lnTo>
-                    <a:pt x="4736845" y="3145526"/>
-                  </a:lnTo>
-                  <a:lnTo>
-                    <a:pt x="4660376" y="3136095"/>
-                  </a:lnTo>
-                  <a:lnTo>
-                    <a:pt x="4583908" y="3125314"/>
-                  </a:lnTo>
-                  <a:lnTo>
-                    <a:pt x="4507439" y="3112991"/>
-                  </a:lnTo>
-                  <a:lnTo>
-                    <a:pt x="4430971" y="3098905"/>
-                  </a:lnTo>
-                  <a:lnTo>
-                    <a:pt x="4354503" y="3082803"/>
-                  </a:lnTo>
-                  <a:lnTo>
-                    <a:pt x="4278034" y="3064396"/>
-                  </a:lnTo>
-                  <a:lnTo>
-                    <a:pt x="4201566" y="3043357"/>
-                  </a:lnTo>
-                  <a:lnTo>
-                    <a:pt x="4125097" y="3019307"/>
-                  </a:lnTo>
-                  <a:lnTo>
-                    <a:pt x="4048629" y="2991815"/>
-                  </a:lnTo>
-                  <a:lnTo>
-                    <a:pt x="3972160" y="2960390"/>
-                  </a:lnTo>
-                  <a:lnTo>
-                    <a:pt x="3895692" y="2924469"/>
-                  </a:lnTo>
-                  <a:lnTo>
-                    <a:pt x="3819224" y="2883408"/>
-                  </a:lnTo>
-                  <a:lnTo>
-                    <a:pt x="3742755" y="2836471"/>
-                  </a:lnTo>
-                  <a:lnTo>
-                    <a:pt x="3666287" y="2782819"/>
-                  </a:lnTo>
-                  <a:lnTo>
-                    <a:pt x="3589818" y="2721489"/>
-                  </a:lnTo>
-                  <a:lnTo>
-                    <a:pt x="3513350" y="2651384"/>
-                  </a:lnTo>
-                  <a:lnTo>
-                    <a:pt x="3436881" y="2571249"/>
-                  </a:lnTo>
-                  <a:lnTo>
-                    <a:pt x="3360413" y="2479647"/>
-                  </a:lnTo>
-                  <a:lnTo>
-                    <a:pt x="3283945" y="2434143"/>
-                  </a:lnTo>
-                  <a:lnTo>
-                    <a:pt x="3207476" y="2414895"/>
-                  </a:lnTo>
-                  <a:lnTo>
-                    <a:pt x="3131008" y="2395171"/>
-                  </a:lnTo>
-                  <a:lnTo>
-                    <a:pt x="3054539" y="2374959"/>
-                  </a:lnTo>
-                  <a:lnTo>
-                    <a:pt x="2978071" y="2354246"/>
-                  </a:lnTo>
-                  <a:lnTo>
-                    <a:pt x="2901602" y="2333020"/>
-                  </a:lnTo>
-                  <a:lnTo>
-                    <a:pt x="2825134" y="2311269"/>
-                  </a:lnTo>
-                  <a:lnTo>
-                    <a:pt x="2748666" y="2288979"/>
-                  </a:lnTo>
-                  <a:lnTo>
-                    <a:pt x="2672197" y="2266137"/>
-                  </a:lnTo>
-                  <a:lnTo>
-                    <a:pt x="2595729" y="2242729"/>
-                  </a:lnTo>
-                  <a:lnTo>
-                    <a:pt x="2519260" y="2218742"/>
-                  </a:lnTo>
-                  <a:lnTo>
-                    <a:pt x="2442792" y="2194161"/>
-                  </a:lnTo>
-                  <a:lnTo>
-                    <a:pt x="2366323" y="2168971"/>
-                  </a:lnTo>
-                  <a:lnTo>
-                    <a:pt x="2289855" y="2143158"/>
-                  </a:lnTo>
-                  <a:lnTo>
-                    <a:pt x="2213386" y="2116705"/>
-                  </a:lnTo>
-                  <a:lnTo>
-                    <a:pt x="2136918" y="2089597"/>
-                  </a:lnTo>
-                  <a:lnTo>
-                    <a:pt x="2060450" y="2061818"/>
-                  </a:lnTo>
-                  <a:lnTo>
-                    <a:pt x="1983981" y="2033351"/>
-                  </a:lnTo>
-                  <a:lnTo>
-                    <a:pt x="1907513" y="2004180"/>
-                  </a:lnTo>
-                  <a:lnTo>
-                    <a:pt x="1831044" y="1974285"/>
-                  </a:lnTo>
-                  <a:lnTo>
-                    <a:pt x="1754576" y="1943651"/>
-                  </a:lnTo>
-                  <a:lnTo>
-                    <a:pt x="1678107" y="1912258"/>
-                  </a:lnTo>
-                  <a:lnTo>
-                    <a:pt x="1601639" y="1880088"/>
-                  </a:lnTo>
-                  <a:lnTo>
-                    <a:pt x="1525171" y="1847121"/>
-                  </a:lnTo>
-                  <a:lnTo>
-                    <a:pt x="1448702" y="1813338"/>
-                  </a:lnTo>
-                  <a:lnTo>
-                    <a:pt x="1372234" y="1778718"/>
-                  </a:lnTo>
-                  <a:lnTo>
-                    <a:pt x="1295765" y="1743241"/>
-                  </a:lnTo>
-                  <a:lnTo>
-                    <a:pt x="1219297" y="1706886"/>
-                  </a:lnTo>
-                  <a:lnTo>
-                    <a:pt x="1142828" y="1669630"/>
-                  </a:lnTo>
-                  <a:lnTo>
-                    <a:pt x="1066360" y="1631452"/>
-                  </a:lnTo>
-                  <a:lnTo>
-                    <a:pt x="989892" y="1592328"/>
-                  </a:lnTo>
-                  <a:lnTo>
-                    <a:pt x="913423" y="1552236"/>
-                  </a:lnTo>
-                  <a:lnTo>
-                    <a:pt x="836955" y="1511151"/>
-                  </a:lnTo>
-                  <a:lnTo>
-                    <a:pt x="760486" y="1469048"/>
-                  </a:lnTo>
-                  <a:lnTo>
-                    <a:pt x="684018" y="1425903"/>
-                  </a:lnTo>
-                  <a:lnTo>
-                    <a:pt x="607549" y="1381690"/>
-                  </a:lnTo>
-                  <a:lnTo>
-                    <a:pt x="531081" y="1336382"/>
-                  </a:lnTo>
-                  <a:lnTo>
-                    <a:pt x="454613" y="1289952"/>
-                  </a:lnTo>
-                  <a:lnTo>
-                    <a:pt x="378144" y="1242372"/>
-                  </a:lnTo>
-                  <a:lnTo>
-                    <a:pt x="301676" y="1193614"/>
-                  </a:lnTo>
-                  <a:lnTo>
-                    <a:pt x="225207" y="1143649"/>
-                  </a:lnTo>
-                  <a:lnTo>
-                    <a:pt x="148739" y="1092446"/>
-                  </a:lnTo>
-                  <a:lnTo>
-                    <a:pt x="72270" y="1039976"/>
-                  </a:lnTo>
-                  <a:lnTo>
-                    <a:pt x="0" y="989157"/>
+                    <a:pt x="2519260" y="25861"/>
+                  </a:lnTo>
+                  <a:lnTo>
+                    <a:pt x="2595729" y="432197"/>
+                  </a:lnTo>
+                  <a:lnTo>
+                    <a:pt x="2672197" y="787671"/>
+                  </a:lnTo>
+                  <a:lnTo>
+                    <a:pt x="2748666" y="1098648"/>
+                  </a:lnTo>
+                  <a:lnTo>
+                    <a:pt x="2825134" y="1370698"/>
+                  </a:lnTo>
+                  <a:lnTo>
+                    <a:pt x="2901602" y="1608695"/>
+                  </a:lnTo>
+                  <a:lnTo>
+                    <a:pt x="2978071" y="1816901"/>
+                  </a:lnTo>
+                  <a:lnTo>
+                    <a:pt x="3054539" y="1999044"/>
+                  </a:lnTo>
+                  <a:lnTo>
+                    <a:pt x="3131008" y="2158388"/>
+                  </a:lnTo>
+                  <a:lnTo>
+                    <a:pt x="3207476" y="2297786"/>
+                  </a:lnTo>
+                  <a:lnTo>
+                    <a:pt x="3283945" y="2419735"/>
+                  </a:lnTo>
+                  <a:lnTo>
+                    <a:pt x="3360413" y="2499192"/>
+                  </a:lnTo>
+                  <a:lnTo>
+                    <a:pt x="3436881" y="2517867"/>
+                  </a:lnTo>
+                  <a:lnTo>
+                    <a:pt x="3513350" y="2536090"/>
+                  </a:lnTo>
+                  <a:lnTo>
+                    <a:pt x="3589818" y="2553872"/>
+                  </a:lnTo>
+                  <a:lnTo>
+                    <a:pt x="3666287" y="2571225"/>
+                  </a:lnTo>
+                  <a:lnTo>
+                    <a:pt x="3742755" y="2588159"/>
+                  </a:lnTo>
+                  <a:lnTo>
+                    <a:pt x="3819224" y="2604683"/>
+                  </a:lnTo>
+                  <a:lnTo>
+                    <a:pt x="3895692" y="2620808"/>
+                  </a:lnTo>
+                  <a:lnTo>
+                    <a:pt x="3972160" y="2636544"/>
+                  </a:lnTo>
+                  <a:lnTo>
+                    <a:pt x="4048629" y="2651899"/>
+                  </a:lnTo>
+                  <a:lnTo>
+                    <a:pt x="4125097" y="2666883"/>
+                  </a:lnTo>
+                  <a:lnTo>
+                    <a:pt x="4201566" y="2681505"/>
+                  </a:lnTo>
+                  <a:lnTo>
+                    <a:pt x="4278034" y="2695774"/>
+                  </a:lnTo>
+                  <a:lnTo>
+                    <a:pt x="4354503" y="2709698"/>
+                  </a:lnTo>
+                  <a:lnTo>
+                    <a:pt x="4430971" y="2723286"/>
+                  </a:lnTo>
+                  <a:lnTo>
+                    <a:pt x="4507439" y="2736545"/>
+                  </a:lnTo>
+                  <a:lnTo>
+                    <a:pt x="4583908" y="2749484"/>
+                  </a:lnTo>
+                  <a:lnTo>
+                    <a:pt x="4660376" y="2762110"/>
+                  </a:lnTo>
+                  <a:lnTo>
+                    <a:pt x="4736845" y="2774431"/>
+                  </a:lnTo>
+                  <a:lnTo>
+                    <a:pt x="4813313" y="2786455"/>
+                  </a:lnTo>
+                  <a:lnTo>
+                    <a:pt x="4889782" y="2798188"/>
+                  </a:lnTo>
+                  <a:lnTo>
+                    <a:pt x="4966250" y="2809637"/>
+                  </a:lnTo>
+                  <a:lnTo>
+                    <a:pt x="5042719" y="2820810"/>
+                  </a:lnTo>
+                  <a:lnTo>
+                    <a:pt x="5119187" y="2831712"/>
+                  </a:lnTo>
+                  <a:lnTo>
+                    <a:pt x="5195655" y="2842352"/>
+                  </a:lnTo>
+                  <a:lnTo>
+                    <a:pt x="5272124" y="2852734"/>
+                  </a:lnTo>
+                  <a:lnTo>
+                    <a:pt x="5348592" y="2862865"/>
+                  </a:lnTo>
+                  <a:lnTo>
+                    <a:pt x="5425061" y="2872752"/>
+                  </a:lnTo>
+                  <a:lnTo>
+                    <a:pt x="5501529" y="2882399"/>
+                  </a:lnTo>
+                  <a:lnTo>
+                    <a:pt x="5577998" y="2891814"/>
+                  </a:lnTo>
+                  <a:lnTo>
+                    <a:pt x="5654466" y="2901001"/>
+                  </a:lnTo>
+                  <a:lnTo>
+                    <a:pt x="5730934" y="2909966"/>
+                  </a:lnTo>
+                  <a:lnTo>
+                    <a:pt x="5807403" y="2918714"/>
+                  </a:lnTo>
+                  <a:lnTo>
+                    <a:pt x="5883871" y="2927251"/>
+                  </a:lnTo>
+                  <a:lnTo>
+                    <a:pt x="5960340" y="2935582"/>
+                  </a:lnTo>
+                  <a:lnTo>
+                    <a:pt x="6036808" y="2943711"/>
+                  </a:lnTo>
+                  <a:lnTo>
+                    <a:pt x="6113277" y="2951644"/>
+                  </a:lnTo>
+                  <a:lnTo>
+                    <a:pt x="6189745" y="2959386"/>
+                  </a:lnTo>
+                  <a:lnTo>
+                    <a:pt x="6266213" y="2966940"/>
+                  </a:lnTo>
+                  <a:lnTo>
+                    <a:pt x="6342682" y="2974312"/>
+                  </a:lnTo>
+                  <a:lnTo>
+                    <a:pt x="6419150" y="2981505"/>
+                  </a:lnTo>
+                  <a:lnTo>
+                    <a:pt x="6495619" y="2988525"/>
+                  </a:lnTo>
+                  <a:lnTo>
+                    <a:pt x="6572087" y="2995375"/>
+                  </a:lnTo>
+                  <a:lnTo>
+                    <a:pt x="6648556" y="3002060"/>
+                  </a:lnTo>
+                  <a:lnTo>
+                    <a:pt x="6725024" y="3008583"/>
+                  </a:lnTo>
+                  <a:lnTo>
+                    <a:pt x="6801492" y="3014948"/>
+                  </a:lnTo>
+                  <a:lnTo>
+                    <a:pt x="6877961" y="3021160"/>
+                  </a:lnTo>
+                  <a:lnTo>
+                    <a:pt x="6954429" y="3027221"/>
+                  </a:lnTo>
+                  <a:lnTo>
+                    <a:pt x="7030898" y="3033136"/>
+                  </a:lnTo>
+                  <a:lnTo>
+                    <a:pt x="7107366" y="3038909"/>
+                  </a:lnTo>
+                  <a:lnTo>
+                    <a:pt x="7183835" y="3044541"/>
+                  </a:lnTo>
+                  <a:lnTo>
+                    <a:pt x="7260303" y="3050038"/>
+                  </a:lnTo>
+                  <a:lnTo>
+                    <a:pt x="7260303" y="3271200"/>
+                  </a:lnTo>
+                  <a:lnTo>
+                    <a:pt x="7183835" y="3271084"/>
+                  </a:lnTo>
+                  <a:lnTo>
+                    <a:pt x="7107366" y="3270951"/>
+                  </a:lnTo>
+                  <a:lnTo>
+                    <a:pt x="7030898" y="3270799"/>
+                  </a:lnTo>
+                  <a:lnTo>
+                    <a:pt x="6954429" y="3270625"/>
+                  </a:lnTo>
+                  <a:lnTo>
+                    <a:pt x="6877961" y="3270426"/>
+                  </a:lnTo>
+                  <a:lnTo>
+                    <a:pt x="6801492" y="3270199"/>
+                  </a:lnTo>
+                  <a:lnTo>
+                    <a:pt x="6725024" y="3269939"/>
+                  </a:lnTo>
+                  <a:lnTo>
+                    <a:pt x="6648556" y="3269642"/>
+                  </a:lnTo>
+                  <a:lnTo>
+                    <a:pt x="6572087" y="3269303"/>
+                  </a:lnTo>
+                  <a:lnTo>
+                    <a:pt x="6495619" y="3268915"/>
+                  </a:lnTo>
+                  <a:lnTo>
+                    <a:pt x="6419150" y="3268471"/>
+                  </a:lnTo>
+                  <a:lnTo>
+                    <a:pt x="6342682" y="3267964"/>
+                  </a:lnTo>
+                  <a:lnTo>
+                    <a:pt x="6266213" y="3267385"/>
+                  </a:lnTo>
+                  <a:lnTo>
+                    <a:pt x="6189745" y="3266722"/>
+                  </a:lnTo>
+                  <a:lnTo>
+                    <a:pt x="6113277" y="3265965"/>
+                  </a:lnTo>
+                  <a:lnTo>
+                    <a:pt x="6036808" y="3265100"/>
+                  </a:lnTo>
+                  <a:lnTo>
+                    <a:pt x="5960340" y="3264110"/>
+                  </a:lnTo>
+                  <a:lnTo>
+                    <a:pt x="5883871" y="3262979"/>
+                  </a:lnTo>
+                  <a:lnTo>
+                    <a:pt x="5807403" y="3261687"/>
+                  </a:lnTo>
+                  <a:lnTo>
+                    <a:pt x="5730934" y="3260209"/>
+                  </a:lnTo>
+                  <a:lnTo>
+                    <a:pt x="5654466" y="3258520"/>
+                  </a:lnTo>
+                  <a:lnTo>
+                    <a:pt x="5577998" y="3256589"/>
+                  </a:lnTo>
+                  <a:lnTo>
+                    <a:pt x="5501529" y="3254382"/>
+                  </a:lnTo>
+                  <a:lnTo>
+                    <a:pt x="5425061" y="3251859"/>
+                  </a:lnTo>
+                  <a:lnTo>
+                    <a:pt x="5348592" y="3248975"/>
+                  </a:lnTo>
+                  <a:lnTo>
+                    <a:pt x="5272124" y="3245679"/>
+                  </a:lnTo>
+                  <a:lnTo>
+                    <a:pt x="5195655" y="3241911"/>
+                  </a:lnTo>
+                  <a:lnTo>
+                    <a:pt x="5119187" y="3237603"/>
+                  </a:lnTo>
+                  <a:lnTo>
+                    <a:pt x="5042719" y="3232680"/>
+                  </a:lnTo>
+                  <a:lnTo>
+                    <a:pt x="4966250" y="3227052"/>
+                  </a:lnTo>
+                  <a:lnTo>
+                    <a:pt x="4889782" y="3220618"/>
+                  </a:lnTo>
+                  <a:lnTo>
+                    <a:pt x="4813313" y="3213264"/>
+                  </a:lnTo>
+                  <a:lnTo>
+                    <a:pt x="4736845" y="3204858"/>
+                  </a:lnTo>
+                  <a:lnTo>
+                    <a:pt x="4660376" y="3195249"/>
+                  </a:lnTo>
+                  <a:lnTo>
+                    <a:pt x="4583908" y="3184265"/>
+                  </a:lnTo>
+                  <a:lnTo>
+                    <a:pt x="4507439" y="3171709"/>
+                  </a:lnTo>
+                  <a:lnTo>
+                    <a:pt x="4430971" y="3157357"/>
+                  </a:lnTo>
+                  <a:lnTo>
+                    <a:pt x="4354503" y="3140951"/>
+                  </a:lnTo>
+                  <a:lnTo>
+                    <a:pt x="4278034" y="3122198"/>
+                  </a:lnTo>
+                  <a:lnTo>
+                    <a:pt x="4201566" y="3100761"/>
+                  </a:lnTo>
+                  <a:lnTo>
+                    <a:pt x="4125097" y="3076257"/>
+                  </a:lnTo>
+                  <a:lnTo>
+                    <a:pt x="4048629" y="3048248"/>
+                  </a:lnTo>
+                  <a:lnTo>
+                    <a:pt x="3972160" y="3016230"/>
+                  </a:lnTo>
+                  <a:lnTo>
+                    <a:pt x="3895692" y="2979631"/>
+                  </a:lnTo>
+                  <a:lnTo>
+                    <a:pt x="3819224" y="2937795"/>
+                  </a:lnTo>
+                  <a:lnTo>
+                    <a:pt x="3742755" y="2889973"/>
+                  </a:lnTo>
+                  <a:lnTo>
+                    <a:pt x="3666287" y="2835309"/>
+                  </a:lnTo>
+                  <a:lnTo>
+                    <a:pt x="3589818" y="2772823"/>
+                  </a:lnTo>
+                  <a:lnTo>
+                    <a:pt x="3513350" y="2701395"/>
+                  </a:lnTo>
+                  <a:lnTo>
+                    <a:pt x="3436881" y="2619748"/>
+                  </a:lnTo>
+                  <a:lnTo>
+                    <a:pt x="3360413" y="2526419"/>
+                  </a:lnTo>
+                  <a:lnTo>
+                    <a:pt x="3283945" y="2480056"/>
+                  </a:lnTo>
+                  <a:lnTo>
+                    <a:pt x="3207476" y="2460445"/>
+                  </a:lnTo>
+                  <a:lnTo>
+                    <a:pt x="3131008" y="2440349"/>
+                  </a:lnTo>
+                  <a:lnTo>
+                    <a:pt x="3054539" y="2419756"/>
+                  </a:lnTo>
+                  <a:lnTo>
+                    <a:pt x="2978071" y="2398652"/>
+                  </a:lnTo>
+                  <a:lnTo>
+                    <a:pt x="2901602" y="2377026"/>
+                  </a:lnTo>
+                  <a:lnTo>
+                    <a:pt x="2825134" y="2354864"/>
+                  </a:lnTo>
+                  <a:lnTo>
+                    <a:pt x="2748666" y="2332154"/>
+                  </a:lnTo>
+                  <a:lnTo>
+                    <a:pt x="2672197" y="2308881"/>
+                  </a:lnTo>
+                  <a:lnTo>
+                    <a:pt x="2595729" y="2285032"/>
+                  </a:lnTo>
+                  <a:lnTo>
+                    <a:pt x="2519260" y="2260593"/>
+                  </a:lnTo>
+                  <a:lnTo>
+                    <a:pt x="2442792" y="2235548"/>
+                  </a:lnTo>
+                  <a:lnTo>
+                    <a:pt x="2366323" y="2209883"/>
+                  </a:lnTo>
+                  <a:lnTo>
+                    <a:pt x="2289855" y="2183582"/>
+                  </a:lnTo>
+                  <a:lnTo>
+                    <a:pt x="2213386" y="2156631"/>
+                  </a:lnTo>
+                  <a:lnTo>
+                    <a:pt x="2136918" y="2129012"/>
+                  </a:lnTo>
+                  <a:lnTo>
+                    <a:pt x="2060450" y="2100709"/>
+                  </a:lnTo>
+                  <a:lnTo>
+                    <a:pt x="1983981" y="2071705"/>
+                  </a:lnTo>
+                  <a:lnTo>
+                    <a:pt x="1907513" y="2041983"/>
+                  </a:lnTo>
+                  <a:lnTo>
+                    <a:pt x="1831044" y="2011525"/>
+                  </a:lnTo>
+                  <a:lnTo>
+                    <a:pt x="1754576" y="1980313"/>
+                  </a:lnTo>
+                  <a:lnTo>
+                    <a:pt x="1678107" y="1948328"/>
+                  </a:lnTo>
+                  <a:lnTo>
+                    <a:pt x="1601639" y="1915551"/>
+                  </a:lnTo>
+                  <a:lnTo>
+                    <a:pt x="1525171" y="1881962"/>
+                  </a:lnTo>
+                  <a:lnTo>
+                    <a:pt x="1448702" y="1847541"/>
+                  </a:lnTo>
+                  <a:lnTo>
+                    <a:pt x="1372234" y="1812269"/>
+                  </a:lnTo>
+                  <a:lnTo>
+                    <a:pt x="1295765" y="1776123"/>
+                  </a:lnTo>
+                  <a:lnTo>
+                    <a:pt x="1219297" y="1739081"/>
+                  </a:lnTo>
+                  <a:lnTo>
+                    <a:pt x="1142828" y="1701123"/>
+                  </a:lnTo>
+                  <a:lnTo>
+                    <a:pt x="1066360" y="1662225"/>
+                  </a:lnTo>
+                  <a:lnTo>
+                    <a:pt x="989892" y="1622363"/>
+                  </a:lnTo>
+                  <a:lnTo>
+                    <a:pt x="913423" y="1581514"/>
+                  </a:lnTo>
+                  <a:lnTo>
+                    <a:pt x="836955" y="1539654"/>
+                  </a:lnTo>
+                  <a:lnTo>
+                    <a:pt x="760486" y="1496758"/>
+                  </a:lnTo>
+                  <a:lnTo>
+                    <a:pt x="684018" y="1452799"/>
+                  </a:lnTo>
+                  <a:lnTo>
+                    <a:pt x="607549" y="1407752"/>
+                  </a:lnTo>
+                  <a:lnTo>
+                    <a:pt x="531081" y="1361589"/>
+                  </a:lnTo>
+                  <a:lnTo>
+                    <a:pt x="454613" y="1314283"/>
+                  </a:lnTo>
+                  <a:lnTo>
+                    <a:pt x="378144" y="1265806"/>
+                  </a:lnTo>
+                  <a:lnTo>
+                    <a:pt x="301676" y="1216128"/>
+                  </a:lnTo>
+                  <a:lnTo>
+                    <a:pt x="225207" y="1165220"/>
+                  </a:lnTo>
+                  <a:lnTo>
+                    <a:pt x="148739" y="1113052"/>
+                  </a:lnTo>
+                  <a:lnTo>
+                    <a:pt x="72270" y="1059592"/>
+                  </a:lnTo>
+                  <a:lnTo>
+                    <a:pt x="0" y="1007815"/>
                   </a:lnTo>
                   <a:close/>
                 </a:path>
@@ -3507,210 +3894,210 @@
         </p:sp>
         <p:sp>
           <p:nvSpPr>
-            <p:cNvPr id="22" name="pl22"/>
+            <p:cNvPr id="31" name="pl31"/>
             <p:cNvSpPr/>
             <p:nvPr/>
           </p:nvSpPr>
           <p:spPr>
             <a:xfrm>
-              <a:off x="3430648" y="2209169"/>
-              <a:ext cx="4745300" cy="2993572"/>
+              <a:off x="3430648" y="2185486"/>
+              <a:ext cx="4745300" cy="3050038"/>
             </a:xfrm>
             <a:custGeom>
               <a:avLst/>
               <a:pathLst>
-                <a:path w="4745300" h="2993572">
+                <a:path w="4745300" h="3050038">
                   <a:moveTo>
                     <a:pt x="0" y="0"/>
                   </a:moveTo>
                   <a:lnTo>
-                    <a:pt x="4257" y="25382"/>
-                  </a:lnTo>
-                  <a:lnTo>
-                    <a:pt x="80726" y="424196"/>
-                  </a:lnTo>
-                  <a:lnTo>
-                    <a:pt x="157194" y="773089"/>
-                  </a:lnTo>
-                  <a:lnTo>
-                    <a:pt x="233662" y="1078309"/>
-                  </a:lnTo>
-                  <a:lnTo>
-                    <a:pt x="310131" y="1345323"/>
-                  </a:lnTo>
-                  <a:lnTo>
-                    <a:pt x="386599" y="1578913"/>
-                  </a:lnTo>
-                  <a:lnTo>
-                    <a:pt x="463068" y="1783264"/>
-                  </a:lnTo>
-                  <a:lnTo>
-                    <a:pt x="539536" y="1962036"/>
-                  </a:lnTo>
-                  <a:lnTo>
-                    <a:pt x="616005" y="2118430"/>
-                  </a:lnTo>
-                  <a:lnTo>
-                    <a:pt x="692473" y="2255247"/>
-                  </a:lnTo>
-                  <a:lnTo>
-                    <a:pt x="768941" y="2374938"/>
-                  </a:lnTo>
-                  <a:lnTo>
-                    <a:pt x="845410" y="2452925"/>
-                  </a:lnTo>
-                  <a:lnTo>
-                    <a:pt x="921878" y="2471253"/>
-                  </a:lnTo>
-                  <a:lnTo>
-                    <a:pt x="998347" y="2489139"/>
-                  </a:lnTo>
-                  <a:lnTo>
-                    <a:pt x="1074815" y="2506592"/>
-                  </a:lnTo>
-                  <a:lnTo>
-                    <a:pt x="1151284" y="2523624"/>
-                  </a:lnTo>
-                  <a:lnTo>
-                    <a:pt x="1227752" y="2540244"/>
-                  </a:lnTo>
-                  <a:lnTo>
-                    <a:pt x="1304220" y="2556463"/>
-                  </a:lnTo>
-                  <a:lnTo>
-                    <a:pt x="1380689" y="2572289"/>
-                  </a:lnTo>
-                  <a:lnTo>
-                    <a:pt x="1457157" y="2587733"/>
-                  </a:lnTo>
-                  <a:lnTo>
-                    <a:pt x="1533626" y="2602804"/>
-                  </a:lnTo>
-                  <a:lnTo>
-                    <a:pt x="1610094" y="2617511"/>
-                  </a:lnTo>
-                  <a:lnTo>
-                    <a:pt x="1686563" y="2631863"/>
-                  </a:lnTo>
-                  <a:lnTo>
-                    <a:pt x="1763031" y="2645867"/>
-                  </a:lnTo>
-                  <a:lnTo>
-                    <a:pt x="1839500" y="2659534"/>
-                  </a:lnTo>
-                  <a:lnTo>
-                    <a:pt x="1915968" y="2672870"/>
-                  </a:lnTo>
-                  <a:lnTo>
-                    <a:pt x="1992436" y="2685883"/>
-                  </a:lnTo>
-                  <a:lnTo>
-                    <a:pt x="2068905" y="2698583"/>
-                  </a:lnTo>
-                  <a:lnTo>
-                    <a:pt x="2145373" y="2710975"/>
-                  </a:lnTo>
-                  <a:lnTo>
-                    <a:pt x="2221842" y="2723068"/>
-                  </a:lnTo>
-                  <a:lnTo>
-                    <a:pt x="2298310" y="2734869"/>
-                  </a:lnTo>
-                  <a:lnTo>
-                    <a:pt x="2374779" y="2746385"/>
-                  </a:lnTo>
-                  <a:lnTo>
-                    <a:pt x="2451247" y="2757622"/>
-                  </a:lnTo>
-                  <a:lnTo>
-                    <a:pt x="2527715" y="2768588"/>
-                  </a:lnTo>
-                  <a:lnTo>
-                    <a:pt x="2604184" y="2779289"/>
-                  </a:lnTo>
-                  <a:lnTo>
-                    <a:pt x="2680652" y="2789731"/>
-                  </a:lnTo>
-                  <a:lnTo>
-                    <a:pt x="2757121" y="2799921"/>
-                  </a:lnTo>
-                  <a:lnTo>
-                    <a:pt x="2833589" y="2809865"/>
-                  </a:lnTo>
-                  <a:lnTo>
-                    <a:pt x="2910058" y="2819568"/>
-                  </a:lnTo>
-                  <a:lnTo>
-                    <a:pt x="2986526" y="2829037"/>
-                  </a:lnTo>
-                  <a:lnTo>
-                    <a:pt x="3062994" y="2838278"/>
-                  </a:lnTo>
-                  <a:lnTo>
-                    <a:pt x="3139463" y="2847295"/>
-                  </a:lnTo>
-                  <a:lnTo>
-                    <a:pt x="3215931" y="2856094"/>
-                  </a:lnTo>
-                  <a:lnTo>
-                    <a:pt x="3292400" y="2864680"/>
-                  </a:lnTo>
-                  <a:lnTo>
-                    <a:pt x="3368868" y="2873059"/>
-                  </a:lnTo>
-                  <a:lnTo>
-                    <a:pt x="3445337" y="2881235"/>
-                  </a:lnTo>
-                  <a:lnTo>
-                    <a:pt x="3521805" y="2889214"/>
-                  </a:lnTo>
-                  <a:lnTo>
-                    <a:pt x="3598273" y="2897000"/>
-                  </a:lnTo>
-                  <a:lnTo>
-                    <a:pt x="3674742" y="2904598"/>
-                  </a:lnTo>
-                  <a:lnTo>
-                    <a:pt x="3751210" y="2912013"/>
-                  </a:lnTo>
-                  <a:lnTo>
-                    <a:pt x="3827679" y="2919248"/>
-                  </a:lnTo>
-                  <a:lnTo>
-                    <a:pt x="3904147" y="2926308"/>
-                  </a:lnTo>
-                  <a:lnTo>
-                    <a:pt x="3980616" y="2933198"/>
-                  </a:lnTo>
-                  <a:lnTo>
-                    <a:pt x="4057084" y="2939922"/>
-                  </a:lnTo>
-                  <a:lnTo>
-                    <a:pt x="4133553" y="2946482"/>
-                  </a:lnTo>
-                  <a:lnTo>
-                    <a:pt x="4210021" y="2952885"/>
-                  </a:lnTo>
-                  <a:lnTo>
-                    <a:pt x="4286489" y="2959132"/>
-                  </a:lnTo>
-                  <a:lnTo>
-                    <a:pt x="4362958" y="2965229"/>
-                  </a:lnTo>
-                  <a:lnTo>
-                    <a:pt x="4439426" y="2971178"/>
-                  </a:lnTo>
-                  <a:lnTo>
-                    <a:pt x="4515895" y="2976984"/>
-                  </a:lnTo>
-                  <a:lnTo>
-                    <a:pt x="4592363" y="2982649"/>
-                  </a:lnTo>
-                  <a:lnTo>
-                    <a:pt x="4668832" y="2988178"/>
-                  </a:lnTo>
-                  <a:lnTo>
-                    <a:pt x="4745300" y="2993572"/>
+                    <a:pt x="4257" y="25861"/>
+                  </a:lnTo>
+                  <a:lnTo>
+                    <a:pt x="80726" y="432197"/>
+                  </a:lnTo>
+                  <a:lnTo>
+                    <a:pt x="157194" y="787671"/>
+                  </a:lnTo>
+                  <a:lnTo>
+                    <a:pt x="233662" y="1098648"/>
+                  </a:lnTo>
+                  <a:lnTo>
+                    <a:pt x="310131" y="1370698"/>
+                  </a:lnTo>
+                  <a:lnTo>
+                    <a:pt x="386599" y="1608695"/>
+                  </a:lnTo>
+                  <a:lnTo>
+                    <a:pt x="463068" y="1816901"/>
+                  </a:lnTo>
+                  <a:lnTo>
+                    <a:pt x="539536" y="1999044"/>
+                  </a:lnTo>
+                  <a:lnTo>
+                    <a:pt x="616005" y="2158388"/>
+                  </a:lnTo>
+                  <a:lnTo>
+                    <a:pt x="692473" y="2297786"/>
+                  </a:lnTo>
+                  <a:lnTo>
+                    <a:pt x="768941" y="2419735"/>
+                  </a:lnTo>
+                  <a:lnTo>
+                    <a:pt x="845410" y="2499192"/>
+                  </a:lnTo>
+                  <a:lnTo>
+                    <a:pt x="921878" y="2517867"/>
+                  </a:lnTo>
+                  <a:lnTo>
+                    <a:pt x="998347" y="2536090"/>
+                  </a:lnTo>
+                  <a:lnTo>
+                    <a:pt x="1074815" y="2553872"/>
+                  </a:lnTo>
+                  <a:lnTo>
+                    <a:pt x="1151284" y="2571225"/>
+                  </a:lnTo>
+                  <a:lnTo>
+                    <a:pt x="1227752" y="2588159"/>
+                  </a:lnTo>
+                  <a:lnTo>
+                    <a:pt x="1304220" y="2604683"/>
+                  </a:lnTo>
+                  <a:lnTo>
+                    <a:pt x="1380689" y="2620808"/>
+                  </a:lnTo>
+                  <a:lnTo>
+                    <a:pt x="1457157" y="2636544"/>
+                  </a:lnTo>
+                  <a:lnTo>
+                    <a:pt x="1533626" y="2651899"/>
+                  </a:lnTo>
+                  <a:lnTo>
+                    <a:pt x="1610094" y="2666883"/>
+                  </a:lnTo>
+                  <a:lnTo>
+                    <a:pt x="1686563" y="2681505"/>
+                  </a:lnTo>
+                  <a:lnTo>
+                    <a:pt x="1763031" y="2695774"/>
+                  </a:lnTo>
+                  <a:lnTo>
+                    <a:pt x="1839500" y="2709698"/>
+                  </a:lnTo>
+                  <a:lnTo>
+                    <a:pt x="1915968" y="2723286"/>
+                  </a:lnTo>
+                  <a:lnTo>
+                    <a:pt x="1992436" y="2736545"/>
+                  </a:lnTo>
+                  <a:lnTo>
+                    <a:pt x="2068905" y="2749484"/>
+                  </a:lnTo>
+                  <a:lnTo>
+                    <a:pt x="2145373" y="2762110"/>
+                  </a:lnTo>
+                  <a:lnTo>
+                    <a:pt x="2221842" y="2774431"/>
+                  </a:lnTo>
+                  <a:lnTo>
+                    <a:pt x="2298310" y="2786455"/>
+                  </a:lnTo>
+                  <a:lnTo>
+                    <a:pt x="2374779" y="2798188"/>
+                  </a:lnTo>
+                  <a:lnTo>
+                    <a:pt x="2451247" y="2809637"/>
+                  </a:lnTo>
+                  <a:lnTo>
+                    <a:pt x="2527715" y="2820810"/>
+                  </a:lnTo>
+                  <a:lnTo>
+                    <a:pt x="2604184" y="2831712"/>
+                  </a:lnTo>
+                  <a:lnTo>
+                    <a:pt x="2680652" y="2842352"/>
+                  </a:lnTo>
+                  <a:lnTo>
+                    <a:pt x="2757121" y="2852734"/>
+                  </a:lnTo>
+                  <a:lnTo>
+                    <a:pt x="2833589" y="2862865"/>
+                  </a:lnTo>
+                  <a:lnTo>
+                    <a:pt x="2910058" y="2872752"/>
+                  </a:lnTo>
+                  <a:lnTo>
+                    <a:pt x="2986526" y="2882399"/>
+                  </a:lnTo>
+                  <a:lnTo>
+                    <a:pt x="3062994" y="2891814"/>
+                  </a:lnTo>
+                  <a:lnTo>
+                    <a:pt x="3139463" y="2901001"/>
+                  </a:lnTo>
+                  <a:lnTo>
+                    <a:pt x="3215931" y="2909966"/>
+                  </a:lnTo>
+                  <a:lnTo>
+                    <a:pt x="3292400" y="2918714"/>
+                  </a:lnTo>
+                  <a:lnTo>
+                    <a:pt x="3368868" y="2927251"/>
+                  </a:lnTo>
+                  <a:lnTo>
+                    <a:pt x="3445337" y="2935582"/>
+                  </a:lnTo>
+                  <a:lnTo>
+                    <a:pt x="3521805" y="2943711"/>
+                  </a:lnTo>
+                  <a:lnTo>
+                    <a:pt x="3598273" y="2951644"/>
+                  </a:lnTo>
+                  <a:lnTo>
+                    <a:pt x="3674742" y="2959386"/>
+                  </a:lnTo>
+                  <a:lnTo>
+                    <a:pt x="3751210" y="2966940"/>
+                  </a:lnTo>
+                  <a:lnTo>
+                    <a:pt x="3827679" y="2974312"/>
+                  </a:lnTo>
+                  <a:lnTo>
+                    <a:pt x="3904147" y="2981505"/>
+                  </a:lnTo>
+                  <a:lnTo>
+                    <a:pt x="3980616" y="2988525"/>
+                  </a:lnTo>
+                  <a:lnTo>
+                    <a:pt x="4057084" y="2995375"/>
+                  </a:lnTo>
+                  <a:lnTo>
+                    <a:pt x="4133553" y="3002060"/>
+                  </a:lnTo>
+                  <a:lnTo>
+                    <a:pt x="4210021" y="3008583"/>
+                  </a:lnTo>
+                  <a:lnTo>
+                    <a:pt x="4286489" y="3014948"/>
+                  </a:lnTo>
+                  <a:lnTo>
+                    <a:pt x="4362958" y="3021160"/>
+                  </a:lnTo>
+                  <a:lnTo>
+                    <a:pt x="4439426" y="3027221"/>
+                  </a:lnTo>
+                  <a:lnTo>
+                    <a:pt x="4515895" y="3033136"/>
+                  </a:lnTo>
+                  <a:lnTo>
+                    <a:pt x="4592363" y="3038909"/>
+                  </a:lnTo>
+                  <a:lnTo>
+                    <a:pt x="4668832" y="3044541"/>
+                  </a:lnTo>
+                  <a:lnTo>
+                    <a:pt x="4745300" y="3050038"/>
                   </a:lnTo>
                 </a:path>
               </a:pathLst>
@@ -3724,303 +4111,303 @@
         </p:sp>
         <p:sp>
           <p:nvSpPr>
-            <p:cNvPr id="23" name="pl23"/>
+            <p:cNvPr id="32" name="pl32"/>
             <p:cNvSpPr/>
             <p:nvPr/>
           </p:nvSpPr>
           <p:spPr>
             <a:xfrm>
-              <a:off x="915645" y="3198327"/>
-              <a:ext cx="7260303" cy="2221483"/>
+              <a:off x="915645" y="3193302"/>
+              <a:ext cx="7260303" cy="2263385"/>
             </a:xfrm>
             <a:custGeom>
               <a:avLst/>
               <a:pathLst>
-                <a:path w="7260303" h="2221483">
+                <a:path w="7260303" h="2263385">
                   <a:moveTo>
-                    <a:pt x="7260303" y="2221483"/>
+                    <a:pt x="7260303" y="2263385"/>
                   </a:moveTo>
                   <a:lnTo>
-                    <a:pt x="7183835" y="2221368"/>
-                  </a:lnTo>
-                  <a:lnTo>
-                    <a:pt x="7107366" y="2221238"/>
-                  </a:lnTo>
-                  <a:lnTo>
-                    <a:pt x="7030898" y="2221088"/>
-                  </a:lnTo>
-                  <a:lnTo>
-                    <a:pt x="6954429" y="2220918"/>
-                  </a:lnTo>
-                  <a:lnTo>
-                    <a:pt x="6877961" y="2220723"/>
-                  </a:lnTo>
-                  <a:lnTo>
-                    <a:pt x="6801492" y="2220499"/>
-                  </a:lnTo>
-                  <a:lnTo>
-                    <a:pt x="6725024" y="2220245"/>
-                  </a:lnTo>
-                  <a:lnTo>
-                    <a:pt x="6648556" y="2219953"/>
-                  </a:lnTo>
-                  <a:lnTo>
-                    <a:pt x="6572087" y="2219620"/>
-                  </a:lnTo>
-                  <a:lnTo>
-                    <a:pt x="6495619" y="2219239"/>
-                  </a:lnTo>
-                  <a:lnTo>
-                    <a:pt x="6419150" y="2218804"/>
-                  </a:lnTo>
-                  <a:lnTo>
-                    <a:pt x="6342682" y="2218306"/>
-                  </a:lnTo>
-                  <a:lnTo>
-                    <a:pt x="6266213" y="2217738"/>
-                  </a:lnTo>
-                  <a:lnTo>
-                    <a:pt x="6189745" y="2217088"/>
-                  </a:lnTo>
-                  <a:lnTo>
-                    <a:pt x="6113277" y="2216344"/>
-                  </a:lnTo>
-                  <a:lnTo>
-                    <a:pt x="6036808" y="2215495"/>
-                  </a:lnTo>
-                  <a:lnTo>
-                    <a:pt x="5960340" y="2214524"/>
-                  </a:lnTo>
-                  <a:lnTo>
-                    <a:pt x="5883871" y="2213414"/>
-                  </a:lnTo>
-                  <a:lnTo>
-                    <a:pt x="5807403" y="2212145"/>
-                  </a:lnTo>
-                  <a:lnTo>
-                    <a:pt x="5730934" y="2210695"/>
-                  </a:lnTo>
-                  <a:lnTo>
-                    <a:pt x="5654466" y="2209037"/>
-                  </a:lnTo>
-                  <a:lnTo>
-                    <a:pt x="5577998" y="2207142"/>
-                  </a:lnTo>
-                  <a:lnTo>
-                    <a:pt x="5501529" y="2204976"/>
-                  </a:lnTo>
-                  <a:lnTo>
-                    <a:pt x="5425061" y="2202500"/>
-                  </a:lnTo>
-                  <a:lnTo>
-                    <a:pt x="5348592" y="2199669"/>
-                  </a:lnTo>
-                  <a:lnTo>
-                    <a:pt x="5272124" y="2196434"/>
-                  </a:lnTo>
-                  <a:lnTo>
-                    <a:pt x="5195655" y="2192735"/>
-                  </a:lnTo>
-                  <a:lnTo>
-                    <a:pt x="5119187" y="2188508"/>
-                  </a:lnTo>
-                  <a:lnTo>
-                    <a:pt x="5042719" y="2183675"/>
-                  </a:lnTo>
-                  <a:lnTo>
-                    <a:pt x="4966250" y="2178151"/>
-                  </a:lnTo>
-                  <a:lnTo>
-                    <a:pt x="4889782" y="2171837"/>
-                  </a:lnTo>
-                  <a:lnTo>
-                    <a:pt x="4813313" y="2164619"/>
-                  </a:lnTo>
-                  <a:lnTo>
-                    <a:pt x="4736845" y="2156368"/>
-                  </a:lnTo>
-                  <a:lnTo>
-                    <a:pt x="4660376" y="2146937"/>
-                  </a:lnTo>
-                  <a:lnTo>
-                    <a:pt x="4583908" y="2136156"/>
-                  </a:lnTo>
-                  <a:lnTo>
-                    <a:pt x="4507439" y="2123833"/>
-                  </a:lnTo>
-                  <a:lnTo>
-                    <a:pt x="4430971" y="2109747"/>
-                  </a:lnTo>
-                  <a:lnTo>
-                    <a:pt x="4354503" y="2093645"/>
-                  </a:lnTo>
-                  <a:lnTo>
-                    <a:pt x="4278034" y="2075239"/>
-                  </a:lnTo>
-                  <a:lnTo>
-                    <a:pt x="4201566" y="2054199"/>
-                  </a:lnTo>
-                  <a:lnTo>
-                    <a:pt x="4125097" y="2030149"/>
-                  </a:lnTo>
-                  <a:lnTo>
-                    <a:pt x="4048629" y="2002657"/>
-                  </a:lnTo>
-                  <a:lnTo>
-                    <a:pt x="3972160" y="1971232"/>
-                  </a:lnTo>
-                  <a:lnTo>
-                    <a:pt x="3895692" y="1935311"/>
-                  </a:lnTo>
-                  <a:lnTo>
-                    <a:pt x="3819224" y="1894250"/>
-                  </a:lnTo>
-                  <a:lnTo>
-                    <a:pt x="3742755" y="1847313"/>
-                  </a:lnTo>
-                  <a:lnTo>
-                    <a:pt x="3666287" y="1793661"/>
-                  </a:lnTo>
-                  <a:lnTo>
-                    <a:pt x="3589818" y="1732331"/>
-                  </a:lnTo>
-                  <a:lnTo>
-                    <a:pt x="3513350" y="1662227"/>
-                  </a:lnTo>
-                  <a:lnTo>
-                    <a:pt x="3436881" y="1582091"/>
-                  </a:lnTo>
-                  <a:lnTo>
-                    <a:pt x="3360413" y="1490489"/>
-                  </a:lnTo>
-                  <a:lnTo>
-                    <a:pt x="3283945" y="1444985"/>
-                  </a:lnTo>
-                  <a:lnTo>
-                    <a:pt x="3207476" y="1425737"/>
-                  </a:lnTo>
-                  <a:lnTo>
-                    <a:pt x="3131008" y="1406013"/>
-                  </a:lnTo>
-                  <a:lnTo>
-                    <a:pt x="3054539" y="1385801"/>
-                  </a:lnTo>
-                  <a:lnTo>
-                    <a:pt x="2978071" y="1365088"/>
-                  </a:lnTo>
-                  <a:lnTo>
-                    <a:pt x="2901602" y="1343862"/>
-                  </a:lnTo>
-                  <a:lnTo>
-                    <a:pt x="2825134" y="1322111"/>
-                  </a:lnTo>
-                  <a:lnTo>
-                    <a:pt x="2748666" y="1299821"/>
-                  </a:lnTo>
-                  <a:lnTo>
-                    <a:pt x="2672197" y="1276979"/>
-                  </a:lnTo>
-                  <a:lnTo>
-                    <a:pt x="2595729" y="1253571"/>
-                  </a:lnTo>
-                  <a:lnTo>
-                    <a:pt x="2519260" y="1229584"/>
-                  </a:lnTo>
-                  <a:lnTo>
-                    <a:pt x="2442792" y="1205003"/>
-                  </a:lnTo>
-                  <a:lnTo>
-                    <a:pt x="2366323" y="1179813"/>
-                  </a:lnTo>
-                  <a:lnTo>
-                    <a:pt x="2289855" y="1154000"/>
-                  </a:lnTo>
-                  <a:lnTo>
-                    <a:pt x="2213386" y="1127547"/>
-                  </a:lnTo>
-                  <a:lnTo>
-                    <a:pt x="2136918" y="1100439"/>
-                  </a:lnTo>
-                  <a:lnTo>
-                    <a:pt x="2060450" y="1072660"/>
-                  </a:lnTo>
-                  <a:lnTo>
-                    <a:pt x="1983981" y="1044193"/>
-                  </a:lnTo>
-                  <a:lnTo>
-                    <a:pt x="1907513" y="1015022"/>
-                  </a:lnTo>
-                  <a:lnTo>
-                    <a:pt x="1831044" y="985127"/>
-                  </a:lnTo>
-                  <a:lnTo>
-                    <a:pt x="1754576" y="954493"/>
-                  </a:lnTo>
-                  <a:lnTo>
-                    <a:pt x="1678107" y="923100"/>
-                  </a:lnTo>
-                  <a:lnTo>
-                    <a:pt x="1601639" y="890930"/>
-                  </a:lnTo>
-                  <a:lnTo>
-                    <a:pt x="1525171" y="857963"/>
-                  </a:lnTo>
-                  <a:lnTo>
-                    <a:pt x="1448702" y="824180"/>
-                  </a:lnTo>
-                  <a:lnTo>
-                    <a:pt x="1372234" y="789560"/>
-                  </a:lnTo>
-                  <a:lnTo>
-                    <a:pt x="1295765" y="754083"/>
-                  </a:lnTo>
-                  <a:lnTo>
-                    <a:pt x="1219297" y="717728"/>
-                  </a:lnTo>
-                  <a:lnTo>
-                    <a:pt x="1142828" y="680472"/>
-                  </a:lnTo>
-                  <a:lnTo>
-                    <a:pt x="1066360" y="642294"/>
-                  </a:lnTo>
-                  <a:lnTo>
-                    <a:pt x="989892" y="603170"/>
-                  </a:lnTo>
-                  <a:lnTo>
-                    <a:pt x="913423" y="563078"/>
-                  </a:lnTo>
-                  <a:lnTo>
-                    <a:pt x="836955" y="521993"/>
-                  </a:lnTo>
-                  <a:lnTo>
-                    <a:pt x="760486" y="479890"/>
-                  </a:lnTo>
-                  <a:lnTo>
-                    <a:pt x="684018" y="436745"/>
-                  </a:lnTo>
-                  <a:lnTo>
-                    <a:pt x="607549" y="392532"/>
-                  </a:lnTo>
-                  <a:lnTo>
-                    <a:pt x="531081" y="347224"/>
-                  </a:lnTo>
-                  <a:lnTo>
-                    <a:pt x="454613" y="300794"/>
-                  </a:lnTo>
-                  <a:lnTo>
-                    <a:pt x="378144" y="253214"/>
-                  </a:lnTo>
-                  <a:lnTo>
-                    <a:pt x="301676" y="204456"/>
-                  </a:lnTo>
-                  <a:lnTo>
-                    <a:pt x="225207" y="154491"/>
-                  </a:lnTo>
-                  <a:lnTo>
-                    <a:pt x="148739" y="103288"/>
-                  </a:lnTo>
-                  <a:lnTo>
-                    <a:pt x="72270" y="50818"/>
+                    <a:pt x="7183835" y="2263268"/>
+                  </a:lnTo>
+                  <a:lnTo>
+                    <a:pt x="7107366" y="2263135"/>
+                  </a:lnTo>
+                  <a:lnTo>
+                    <a:pt x="7030898" y="2262983"/>
+                  </a:lnTo>
+                  <a:lnTo>
+                    <a:pt x="6954429" y="2262809"/>
+                  </a:lnTo>
+                  <a:lnTo>
+                    <a:pt x="6877961" y="2262610"/>
+                  </a:lnTo>
+                  <a:lnTo>
+                    <a:pt x="6801492" y="2262383"/>
+                  </a:lnTo>
+                  <a:lnTo>
+                    <a:pt x="6725024" y="2262123"/>
+                  </a:lnTo>
+                  <a:lnTo>
+                    <a:pt x="6648556" y="2261826"/>
+                  </a:lnTo>
+                  <a:lnTo>
+                    <a:pt x="6572087" y="2261487"/>
+                  </a:lnTo>
+                  <a:lnTo>
+                    <a:pt x="6495619" y="2261099"/>
+                  </a:lnTo>
+                  <a:lnTo>
+                    <a:pt x="6419150" y="2260656"/>
+                  </a:lnTo>
+                  <a:lnTo>
+                    <a:pt x="6342682" y="2260149"/>
+                  </a:lnTo>
+                  <a:lnTo>
+                    <a:pt x="6266213" y="2259569"/>
+                  </a:lnTo>
+                  <a:lnTo>
+                    <a:pt x="6189745" y="2258907"/>
+                  </a:lnTo>
+                  <a:lnTo>
+                    <a:pt x="6113277" y="2258150"/>
+                  </a:lnTo>
+                  <a:lnTo>
+                    <a:pt x="6036808" y="2257284"/>
+                  </a:lnTo>
+                  <a:lnTo>
+                    <a:pt x="5960340" y="2256295"/>
+                  </a:lnTo>
+                  <a:lnTo>
+                    <a:pt x="5883871" y="2255164"/>
+                  </a:lnTo>
+                  <a:lnTo>
+                    <a:pt x="5807403" y="2253871"/>
+                  </a:lnTo>
+                  <a:lnTo>
+                    <a:pt x="5730934" y="2252393"/>
+                  </a:lnTo>
+                  <a:lnTo>
+                    <a:pt x="5654466" y="2250704"/>
+                  </a:lnTo>
+                  <a:lnTo>
+                    <a:pt x="5577998" y="2248774"/>
+                  </a:lnTo>
+                  <a:lnTo>
+                    <a:pt x="5501529" y="2246566"/>
+                  </a:lnTo>
+                  <a:lnTo>
+                    <a:pt x="5425061" y="2244044"/>
+                  </a:lnTo>
+                  <a:lnTo>
+                    <a:pt x="5348592" y="2241160"/>
+                  </a:lnTo>
+                  <a:lnTo>
+                    <a:pt x="5272124" y="2237863"/>
+                  </a:lnTo>
+                  <a:lnTo>
+                    <a:pt x="5195655" y="2234095"/>
+                  </a:lnTo>
+                  <a:lnTo>
+                    <a:pt x="5119187" y="2229788"/>
+                  </a:lnTo>
+                  <a:lnTo>
+                    <a:pt x="5042719" y="2224864"/>
+                  </a:lnTo>
+                  <a:lnTo>
+                    <a:pt x="4966250" y="2219236"/>
+                  </a:lnTo>
+                  <a:lnTo>
+                    <a:pt x="4889782" y="2212802"/>
+                  </a:lnTo>
+                  <a:lnTo>
+                    <a:pt x="4813313" y="2205448"/>
+                  </a:lnTo>
+                  <a:lnTo>
+                    <a:pt x="4736845" y="2197042"/>
+                  </a:lnTo>
+                  <a:lnTo>
+                    <a:pt x="4660376" y="2187433"/>
+                  </a:lnTo>
+                  <a:lnTo>
+                    <a:pt x="4583908" y="2176449"/>
+                  </a:lnTo>
+                  <a:lnTo>
+                    <a:pt x="4507439" y="2163893"/>
+                  </a:lnTo>
+                  <a:lnTo>
+                    <a:pt x="4430971" y="2149541"/>
+                  </a:lnTo>
+                  <a:lnTo>
+                    <a:pt x="4354503" y="2133135"/>
+                  </a:lnTo>
+                  <a:lnTo>
+                    <a:pt x="4278034" y="2114382"/>
+                  </a:lnTo>
+                  <a:lnTo>
+                    <a:pt x="4201566" y="2092946"/>
+                  </a:lnTo>
+                  <a:lnTo>
+                    <a:pt x="4125097" y="2068442"/>
+                  </a:lnTo>
+                  <a:lnTo>
+                    <a:pt x="4048629" y="2040432"/>
+                  </a:lnTo>
+                  <a:lnTo>
+                    <a:pt x="3972160" y="2008414"/>
+                  </a:lnTo>
+                  <a:lnTo>
+                    <a:pt x="3895692" y="1971815"/>
+                  </a:lnTo>
+                  <a:lnTo>
+                    <a:pt x="3819224" y="1929979"/>
+                  </a:lnTo>
+                  <a:lnTo>
+                    <a:pt x="3742755" y="1882158"/>
+                  </a:lnTo>
+                  <a:lnTo>
+                    <a:pt x="3666287" y="1827493"/>
+                  </a:lnTo>
+                  <a:lnTo>
+                    <a:pt x="3589818" y="1765007"/>
+                  </a:lnTo>
+                  <a:lnTo>
+                    <a:pt x="3513350" y="1693580"/>
+                  </a:lnTo>
+                  <a:lnTo>
+                    <a:pt x="3436881" y="1611933"/>
+                  </a:lnTo>
+                  <a:lnTo>
+                    <a:pt x="3360413" y="1518603"/>
+                  </a:lnTo>
+                  <a:lnTo>
+                    <a:pt x="3283945" y="1472240"/>
+                  </a:lnTo>
+                  <a:lnTo>
+                    <a:pt x="3207476" y="1452630"/>
+                  </a:lnTo>
+                  <a:lnTo>
+                    <a:pt x="3131008" y="1432534"/>
+                  </a:lnTo>
+                  <a:lnTo>
+                    <a:pt x="3054539" y="1411940"/>
+                  </a:lnTo>
+                  <a:lnTo>
+                    <a:pt x="2978071" y="1390837"/>
+                  </a:lnTo>
+                  <a:lnTo>
+                    <a:pt x="2901602" y="1369210"/>
+                  </a:lnTo>
+                  <a:lnTo>
+                    <a:pt x="2825134" y="1347049"/>
+                  </a:lnTo>
+                  <a:lnTo>
+                    <a:pt x="2748666" y="1324338"/>
+                  </a:lnTo>
+                  <a:lnTo>
+                    <a:pt x="2672197" y="1301066"/>
+                  </a:lnTo>
+                  <a:lnTo>
+                    <a:pt x="2595729" y="1277216"/>
+                  </a:lnTo>
+                  <a:lnTo>
+                    <a:pt x="2519260" y="1252777"/>
+                  </a:lnTo>
+                  <a:lnTo>
+                    <a:pt x="2442792" y="1227732"/>
+                  </a:lnTo>
+                  <a:lnTo>
+                    <a:pt x="2366323" y="1202067"/>
+                  </a:lnTo>
+                  <a:lnTo>
+                    <a:pt x="2289855" y="1175767"/>
+                  </a:lnTo>
+                  <a:lnTo>
+                    <a:pt x="2213386" y="1148815"/>
+                  </a:lnTo>
+                  <a:lnTo>
+                    <a:pt x="2136918" y="1121196"/>
+                  </a:lnTo>
+                  <a:lnTo>
+                    <a:pt x="2060450" y="1092893"/>
+                  </a:lnTo>
+                  <a:lnTo>
+                    <a:pt x="1983981" y="1063889"/>
+                  </a:lnTo>
+                  <a:lnTo>
+                    <a:pt x="1907513" y="1034167"/>
+                  </a:lnTo>
+                  <a:lnTo>
+                    <a:pt x="1831044" y="1003709"/>
+                  </a:lnTo>
+                  <a:lnTo>
+                    <a:pt x="1754576" y="972497"/>
+                  </a:lnTo>
+                  <a:lnTo>
+                    <a:pt x="1678107" y="940512"/>
+                  </a:lnTo>
+                  <a:lnTo>
+                    <a:pt x="1601639" y="907735"/>
+                  </a:lnTo>
+                  <a:lnTo>
+                    <a:pt x="1525171" y="874146"/>
+                  </a:lnTo>
+                  <a:lnTo>
+                    <a:pt x="1448702" y="839726"/>
+                  </a:lnTo>
+                  <a:lnTo>
+                    <a:pt x="1372234" y="804453"/>
+                  </a:lnTo>
+                  <a:lnTo>
+                    <a:pt x="1295765" y="768307"/>
+                  </a:lnTo>
+                  <a:lnTo>
+                    <a:pt x="1219297" y="731266"/>
+                  </a:lnTo>
+                  <a:lnTo>
+                    <a:pt x="1142828" y="693307"/>
+                  </a:lnTo>
+                  <a:lnTo>
+                    <a:pt x="1066360" y="654409"/>
+                  </a:lnTo>
+                  <a:lnTo>
+                    <a:pt x="989892" y="614547"/>
+                  </a:lnTo>
+                  <a:lnTo>
+                    <a:pt x="913423" y="573699"/>
+                  </a:lnTo>
+                  <a:lnTo>
+                    <a:pt x="836955" y="531839"/>
+                  </a:lnTo>
+                  <a:lnTo>
+                    <a:pt x="760486" y="488942"/>
+                  </a:lnTo>
+                  <a:lnTo>
+                    <a:pt x="684018" y="444983"/>
+                  </a:lnTo>
+                  <a:lnTo>
+                    <a:pt x="607549" y="399936"/>
+                  </a:lnTo>
+                  <a:lnTo>
+                    <a:pt x="531081" y="353773"/>
+                  </a:lnTo>
+                  <a:lnTo>
+                    <a:pt x="454613" y="306467"/>
+                  </a:lnTo>
+                  <a:lnTo>
+                    <a:pt x="378144" y="257990"/>
+                  </a:lnTo>
+                  <a:lnTo>
+                    <a:pt x="301676" y="208312"/>
+                  </a:lnTo>
+                  <a:lnTo>
+                    <a:pt x="225207" y="157405"/>
+                  </a:lnTo>
+                  <a:lnTo>
+                    <a:pt x="148739" y="105236"/>
+                  </a:lnTo>
+                  <a:lnTo>
+                    <a:pt x="72270" y="51776"/>
                   </a:lnTo>
                   <a:lnTo>
                     <a:pt x="0" y="0"/>
@@ -4037,231 +4424,231 @@
         </p:sp>
         <p:sp>
           <p:nvSpPr>
-            <p:cNvPr id="24" name="pl24"/>
+            <p:cNvPr id="33" name="pl33"/>
             <p:cNvSpPr/>
             <p:nvPr/>
           </p:nvSpPr>
           <p:spPr>
             <a:xfrm>
-              <a:off x="2864297" y="2209169"/>
-              <a:ext cx="5311651" cy="3198248"/>
+              <a:off x="2864297" y="2185486"/>
+              <a:ext cx="5311651" cy="3258574"/>
             </a:xfrm>
             <a:custGeom>
               <a:avLst/>
               <a:pathLst>
-                <a:path w="5311651" h="3198248">
+                <a:path w="5311651" h="3258574">
                   <a:moveTo>
                     <a:pt x="0" y="0"/>
                   </a:moveTo>
                   <a:lnTo>
-                    <a:pt x="35329" y="117647"/>
-                  </a:lnTo>
-                  <a:lnTo>
-                    <a:pt x="111797" y="352926"/>
-                  </a:lnTo>
-                  <a:lnTo>
-                    <a:pt x="188266" y="570312"/>
-                  </a:lnTo>
-                  <a:lnTo>
-                    <a:pt x="264734" y="771165"/>
-                  </a:lnTo>
-                  <a:lnTo>
-                    <a:pt x="341202" y="956745"/>
-                  </a:lnTo>
-                  <a:lnTo>
-                    <a:pt x="417671" y="1128211"/>
-                  </a:lnTo>
-                  <a:lnTo>
-                    <a:pt x="494139" y="1286637"/>
-                  </a:lnTo>
-                  <a:lnTo>
-                    <a:pt x="570608" y="1433016"/>
-                  </a:lnTo>
-                  <a:lnTo>
-                    <a:pt x="647076" y="1568262"/>
-                  </a:lnTo>
-                  <a:lnTo>
-                    <a:pt x="723545" y="1693224"/>
-                  </a:lnTo>
-                  <a:lnTo>
-                    <a:pt x="800013" y="1808682"/>
-                  </a:lnTo>
-                  <a:lnTo>
-                    <a:pt x="876481" y="1915359"/>
-                  </a:lnTo>
-                  <a:lnTo>
-                    <a:pt x="952950" y="2013924"/>
-                  </a:lnTo>
-                  <a:lnTo>
-                    <a:pt x="1029418" y="2104994"/>
-                  </a:lnTo>
-                  <a:lnTo>
-                    <a:pt x="1105887" y="2189137"/>
-                  </a:lnTo>
-                  <a:lnTo>
-                    <a:pt x="1182355" y="2266882"/>
-                  </a:lnTo>
-                  <a:lnTo>
-                    <a:pt x="1258824" y="2338714"/>
-                  </a:lnTo>
-                  <a:lnTo>
-                    <a:pt x="1335292" y="2405083"/>
-                  </a:lnTo>
-                  <a:lnTo>
-                    <a:pt x="1411760" y="2466406"/>
-                  </a:lnTo>
-                  <a:lnTo>
-                    <a:pt x="1488229" y="2523064"/>
-                  </a:lnTo>
-                  <a:lnTo>
-                    <a:pt x="1564697" y="2575414"/>
-                  </a:lnTo>
-                  <a:lnTo>
-                    <a:pt x="1641166" y="2623783"/>
-                  </a:lnTo>
-                  <a:lnTo>
-                    <a:pt x="1717634" y="2668473"/>
-                  </a:lnTo>
-                  <a:lnTo>
-                    <a:pt x="1794103" y="2709765"/>
-                  </a:lnTo>
-                  <a:lnTo>
-                    <a:pt x="1870571" y="2747917"/>
-                  </a:lnTo>
-                  <a:lnTo>
-                    <a:pt x="1947040" y="2783167"/>
-                  </a:lnTo>
-                  <a:lnTo>
-                    <a:pt x="2023508" y="2815736"/>
-                  </a:lnTo>
-                  <a:lnTo>
-                    <a:pt x="2099976" y="2845829"/>
-                  </a:lnTo>
-                  <a:lnTo>
-                    <a:pt x="2176445" y="2873633"/>
-                  </a:lnTo>
-                  <a:lnTo>
-                    <a:pt x="2252913" y="2899323"/>
-                  </a:lnTo>
-                  <a:lnTo>
-                    <a:pt x="2329382" y="2923059"/>
-                  </a:lnTo>
-                  <a:lnTo>
-                    <a:pt x="2405850" y="2944990"/>
-                  </a:lnTo>
-                  <a:lnTo>
-                    <a:pt x="2482319" y="2965253"/>
-                  </a:lnTo>
-                  <a:lnTo>
-                    <a:pt x="2558787" y="2983975"/>
-                  </a:lnTo>
-                  <a:lnTo>
-                    <a:pt x="2635255" y="3001273"/>
-                  </a:lnTo>
-                  <a:lnTo>
-                    <a:pt x="2711724" y="3017256"/>
-                  </a:lnTo>
-                  <a:lnTo>
-                    <a:pt x="2788192" y="3032023"/>
-                  </a:lnTo>
-                  <a:lnTo>
-                    <a:pt x="2864661" y="3045668"/>
-                  </a:lnTo>
-                  <a:lnTo>
-                    <a:pt x="2941129" y="3058274"/>
-                  </a:lnTo>
-                  <a:lnTo>
-                    <a:pt x="3017598" y="3069922"/>
-                  </a:lnTo>
-                  <a:lnTo>
-                    <a:pt x="3094066" y="3080685"/>
-                  </a:lnTo>
-                  <a:lnTo>
-                    <a:pt x="3170534" y="3090628"/>
-                  </a:lnTo>
-                  <a:lnTo>
-                    <a:pt x="3247003" y="3099816"/>
-                  </a:lnTo>
-                  <a:lnTo>
-                    <a:pt x="3323471" y="3108305"/>
-                  </a:lnTo>
-                  <a:lnTo>
-                    <a:pt x="3399940" y="3116148"/>
-                  </a:lnTo>
-                  <a:lnTo>
-                    <a:pt x="3476408" y="3123395"/>
-                  </a:lnTo>
-                  <a:lnTo>
-                    <a:pt x="3552877" y="3130090"/>
-                  </a:lnTo>
-                  <a:lnTo>
-                    <a:pt x="3629345" y="3136277"/>
-                  </a:lnTo>
-                  <a:lnTo>
-                    <a:pt x="3705813" y="3141993"/>
-                  </a:lnTo>
-                  <a:lnTo>
-                    <a:pt x="3782282" y="3147274"/>
-                  </a:lnTo>
-                  <a:lnTo>
-                    <a:pt x="3858750" y="3152154"/>
-                  </a:lnTo>
-                  <a:lnTo>
-                    <a:pt x="3935219" y="3156662"/>
-                  </a:lnTo>
-                  <a:lnTo>
-                    <a:pt x="4011687" y="3160828"/>
-                  </a:lnTo>
-                  <a:lnTo>
-                    <a:pt x="4088156" y="3164677"/>
-                  </a:lnTo>
-                  <a:lnTo>
-                    <a:pt x="4164624" y="3168233"/>
-                  </a:lnTo>
-                  <a:lnTo>
-                    <a:pt x="4241092" y="3171519"/>
-                  </a:lnTo>
-                  <a:lnTo>
-                    <a:pt x="4317561" y="3174555"/>
-                  </a:lnTo>
-                  <a:lnTo>
-                    <a:pt x="4394029" y="3177360"/>
-                  </a:lnTo>
-                  <a:lnTo>
-                    <a:pt x="4470498" y="3179951"/>
-                  </a:lnTo>
-                  <a:lnTo>
-                    <a:pt x="4546966" y="3182346"/>
-                  </a:lnTo>
-                  <a:lnTo>
-                    <a:pt x="4623435" y="3184559"/>
-                  </a:lnTo>
-                  <a:lnTo>
-                    <a:pt x="4699903" y="3186603"/>
-                  </a:lnTo>
-                  <a:lnTo>
-                    <a:pt x="4776372" y="3188492"/>
-                  </a:lnTo>
-                  <a:lnTo>
-                    <a:pt x="4852840" y="3190237"/>
-                  </a:lnTo>
-                  <a:lnTo>
-                    <a:pt x="4929308" y="3191849"/>
-                  </a:lnTo>
-                  <a:lnTo>
-                    <a:pt x="5005777" y="3193339"/>
-                  </a:lnTo>
-                  <a:lnTo>
-                    <a:pt x="5082245" y="3194715"/>
-                  </a:lnTo>
-                  <a:lnTo>
-                    <a:pt x="5158714" y="3195987"/>
-                  </a:lnTo>
-                  <a:lnTo>
-                    <a:pt x="5235182" y="3197162"/>
-                  </a:lnTo>
-                  <a:lnTo>
-                    <a:pt x="5311651" y="3198248"/>
+                    <a:pt x="35329" y="119866"/>
+                  </a:lnTo>
+                  <a:lnTo>
+                    <a:pt x="111797" y="359583"/>
+                  </a:lnTo>
+                  <a:lnTo>
+                    <a:pt x="188266" y="581069"/>
+                  </a:lnTo>
+                  <a:lnTo>
+                    <a:pt x="264734" y="785711"/>
+                  </a:lnTo>
+                  <a:lnTo>
+                    <a:pt x="341202" y="974791"/>
+                  </a:lnTo>
+                  <a:lnTo>
+                    <a:pt x="417671" y="1149492"/>
+                  </a:lnTo>
+                  <a:lnTo>
+                    <a:pt x="494139" y="1310906"/>
+                  </a:lnTo>
+                  <a:lnTo>
+                    <a:pt x="570608" y="1460046"/>
+                  </a:lnTo>
+                  <a:lnTo>
+                    <a:pt x="647076" y="1597843"/>
+                  </a:lnTo>
+                  <a:lnTo>
+                    <a:pt x="723545" y="1725162"/>
+                  </a:lnTo>
+                  <a:lnTo>
+                    <a:pt x="800013" y="1842797"/>
+                  </a:lnTo>
+                  <a:lnTo>
+                    <a:pt x="876481" y="1951487"/>
+                  </a:lnTo>
+                  <a:lnTo>
+                    <a:pt x="952950" y="2051911"/>
+                  </a:lnTo>
+                  <a:lnTo>
+                    <a:pt x="1029418" y="2144698"/>
+                  </a:lnTo>
+                  <a:lnTo>
+                    <a:pt x="1105887" y="2230429"/>
+                  </a:lnTo>
+                  <a:lnTo>
+                    <a:pt x="1182355" y="2309640"/>
+                  </a:lnTo>
+                  <a:lnTo>
+                    <a:pt x="1258824" y="2382827"/>
+                  </a:lnTo>
+                  <a:lnTo>
+                    <a:pt x="1335292" y="2450449"/>
+                  </a:lnTo>
+                  <a:lnTo>
+                    <a:pt x="1411760" y="2512928"/>
+                  </a:lnTo>
+                  <a:lnTo>
+                    <a:pt x="1488229" y="2570655"/>
+                  </a:lnTo>
+                  <a:lnTo>
+                    <a:pt x="1564697" y="2623992"/>
+                  </a:lnTo>
+                  <a:lnTo>
+                    <a:pt x="1641166" y="2673273"/>
+                  </a:lnTo>
+                  <a:lnTo>
+                    <a:pt x="1717634" y="2718807"/>
+                  </a:lnTo>
+                  <a:lnTo>
+                    <a:pt x="1794103" y="2760877"/>
+                  </a:lnTo>
+                  <a:lnTo>
+                    <a:pt x="1870571" y="2799749"/>
+                  </a:lnTo>
+                  <a:lnTo>
+                    <a:pt x="1947040" y="2835664"/>
+                  </a:lnTo>
+                  <a:lnTo>
+                    <a:pt x="2023508" y="2868847"/>
+                  </a:lnTo>
+                  <a:lnTo>
+                    <a:pt x="2099976" y="2899508"/>
+                  </a:lnTo>
+                  <a:lnTo>
+                    <a:pt x="2176445" y="2927836"/>
+                  </a:lnTo>
+                  <a:lnTo>
+                    <a:pt x="2252913" y="2954010"/>
+                  </a:lnTo>
+                  <a:lnTo>
+                    <a:pt x="2329382" y="2978194"/>
+                  </a:lnTo>
+                  <a:lnTo>
+                    <a:pt x="2405850" y="3000539"/>
+                  </a:lnTo>
+                  <a:lnTo>
+                    <a:pt x="2482319" y="3021184"/>
+                  </a:lnTo>
+                  <a:lnTo>
+                    <a:pt x="2558787" y="3040259"/>
+                  </a:lnTo>
+                  <a:lnTo>
+                    <a:pt x="2635255" y="3057884"/>
+                  </a:lnTo>
+                  <a:lnTo>
+                    <a:pt x="2711724" y="3074168"/>
+                  </a:lnTo>
+                  <a:lnTo>
+                    <a:pt x="2788192" y="3089214"/>
+                  </a:lnTo>
+                  <a:lnTo>
+                    <a:pt x="2864661" y="3103116"/>
+                  </a:lnTo>
+                  <a:lnTo>
+                    <a:pt x="2941129" y="3115960"/>
+                  </a:lnTo>
+                  <a:lnTo>
+                    <a:pt x="3017598" y="3127828"/>
+                  </a:lnTo>
+                  <a:lnTo>
+                    <a:pt x="3094066" y="3138793"/>
+                  </a:lnTo>
+                  <a:lnTo>
+                    <a:pt x="3170534" y="3148924"/>
+                  </a:lnTo>
+                  <a:lnTo>
+                    <a:pt x="3247003" y="3158285"/>
+                  </a:lnTo>
+                  <a:lnTo>
+                    <a:pt x="3323471" y="3166934"/>
+                  </a:lnTo>
+                  <a:lnTo>
+                    <a:pt x="3399940" y="3174925"/>
+                  </a:lnTo>
+                  <a:lnTo>
+                    <a:pt x="3476408" y="3182309"/>
+                  </a:lnTo>
+                  <a:lnTo>
+                    <a:pt x="3552877" y="3189131"/>
+                  </a:lnTo>
+                  <a:lnTo>
+                    <a:pt x="3629345" y="3195434"/>
+                  </a:lnTo>
+                  <a:lnTo>
+                    <a:pt x="3705813" y="3201258"/>
+                  </a:lnTo>
+                  <a:lnTo>
+                    <a:pt x="3782282" y="3206639"/>
+                  </a:lnTo>
+                  <a:lnTo>
+                    <a:pt x="3858750" y="3211610"/>
+                  </a:lnTo>
+                  <a:lnTo>
+                    <a:pt x="3935219" y="3216204"/>
+                  </a:lnTo>
+                  <a:lnTo>
+                    <a:pt x="4011687" y="3220448"/>
+                  </a:lnTo>
+                  <a:lnTo>
+                    <a:pt x="4088156" y="3224370"/>
+                  </a:lnTo>
+                  <a:lnTo>
+                    <a:pt x="4164624" y="3227993"/>
+                  </a:lnTo>
+                  <a:lnTo>
+                    <a:pt x="4241092" y="3231341"/>
+                  </a:lnTo>
+                  <a:lnTo>
+                    <a:pt x="4317561" y="3234434"/>
+                  </a:lnTo>
+                  <a:lnTo>
+                    <a:pt x="4394029" y="3237292"/>
+                  </a:lnTo>
+                  <a:lnTo>
+                    <a:pt x="4470498" y="3239932"/>
+                  </a:lnTo>
+                  <a:lnTo>
+                    <a:pt x="4546966" y="3242372"/>
+                  </a:lnTo>
+                  <a:lnTo>
+                    <a:pt x="4623435" y="3244626"/>
+                  </a:lnTo>
+                  <a:lnTo>
+                    <a:pt x="4699903" y="3246709"/>
+                  </a:lnTo>
+                  <a:lnTo>
+                    <a:pt x="4776372" y="3248634"/>
+                  </a:lnTo>
+                  <a:lnTo>
+                    <a:pt x="4852840" y="3250412"/>
+                  </a:lnTo>
+                  <a:lnTo>
+                    <a:pt x="4929308" y="3252054"/>
+                  </a:lnTo>
+                  <a:lnTo>
+                    <a:pt x="5005777" y="3253572"/>
+                  </a:lnTo>
+                  <a:lnTo>
+                    <a:pt x="5082245" y="3254975"/>
+                  </a:lnTo>
+                  <a:lnTo>
+                    <a:pt x="5158714" y="3256271"/>
+                  </a:lnTo>
+                  <a:lnTo>
+                    <a:pt x="5235182" y="3257468"/>
+                  </a:lnTo>
+                  <a:lnTo>
+                    <a:pt x="5311651" y="3258574"/>
                   </a:lnTo>
                 </a:path>
               </a:pathLst>
@@ -4284,13 +4671,13 @@
         </p:sp>
         <p:sp>
           <p:nvSpPr>
-            <p:cNvPr id="25" name="pl25"/>
+            <p:cNvPr id="34" name="pl34"/>
             <p:cNvSpPr/>
             <p:nvPr/>
           </p:nvSpPr>
           <p:spPr>
             <a:xfrm>
-              <a:off x="915645" y="4655980"/>
+              <a:off x="915645" y="4678449"/>
               <a:ext cx="7682587" cy="0"/>
             </a:xfrm>
             <a:custGeom>
@@ -4327,21 +4714,21 @@
         </p:sp>
         <p:sp>
           <p:nvSpPr>
-            <p:cNvPr id="26" name="pl26"/>
+            <p:cNvPr id="35" name="pl35"/>
             <p:cNvSpPr/>
             <p:nvPr/>
           </p:nvSpPr>
           <p:spPr>
             <a:xfrm>
-              <a:off x="4250960" y="2209169"/>
-              <a:ext cx="0" cy="3364365"/>
+              <a:off x="4250960" y="2185486"/>
+              <a:ext cx="0" cy="3427824"/>
             </a:xfrm>
             <a:custGeom>
               <a:avLst/>
               <a:pathLst>
-                <a:path w="0" h="3364365">
+                <a:path w="0" h="3427824">
                   <a:moveTo>
-                    <a:pt x="0" y="3364365"/>
+                    <a:pt x="0" y="3427824"/>
                   </a:moveTo>
                   <a:lnTo>
                     <a:pt x="0" y="0"/>
@@ -4370,13 +4757,13 @@
         </p:sp>
         <p:sp>
           <p:nvSpPr>
-            <p:cNvPr id="27" name="tx27"/>
+            <p:cNvPr id="36" name="tx36"/>
             <p:cNvSpPr/>
             <p:nvPr/>
           </p:nvSpPr>
           <p:spPr>
             <a:xfrm>
-              <a:off x="756929" y="5369631"/>
+              <a:off x="756929" y="5406523"/>
               <a:ext cx="79004" cy="101955"/>
             </a:xfrm>
             <a:prstGeom prst="rect">
@@ -4416,13 +4803,13 @@
         </p:sp>
         <p:sp>
           <p:nvSpPr>
-            <p:cNvPr id="28" name="tx28"/>
+            <p:cNvPr id="37" name="tx37"/>
             <p:cNvSpPr/>
             <p:nvPr/>
           </p:nvSpPr>
           <p:spPr>
             <a:xfrm>
-              <a:off x="756929" y="4605002"/>
+              <a:off x="756929" y="4627472"/>
               <a:ext cx="79004" cy="101955"/>
             </a:xfrm>
             <a:prstGeom prst="rect">
@@ -4462,13 +4849,13 @@
         </p:sp>
         <p:sp>
           <p:nvSpPr>
-            <p:cNvPr id="29" name="tx29"/>
+            <p:cNvPr id="38" name="tx38"/>
             <p:cNvSpPr/>
             <p:nvPr/>
           </p:nvSpPr>
           <p:spPr>
             <a:xfrm>
-              <a:off x="756929" y="3840374"/>
+              <a:off x="756929" y="3848420"/>
               <a:ext cx="79004" cy="101955"/>
             </a:xfrm>
             <a:prstGeom prst="rect">
@@ -4508,13 +4895,13 @@
         </p:sp>
         <p:sp>
           <p:nvSpPr>
-            <p:cNvPr id="30" name="tx30"/>
+            <p:cNvPr id="39" name="tx39"/>
             <p:cNvSpPr/>
             <p:nvPr/>
           </p:nvSpPr>
           <p:spPr>
             <a:xfrm>
-              <a:off x="756929" y="3075745"/>
+              <a:off x="756929" y="3069369"/>
               <a:ext cx="79004" cy="101955"/>
             </a:xfrm>
             <a:prstGeom prst="rect">
@@ -4554,13 +4941,13 @@
         </p:sp>
         <p:sp>
           <p:nvSpPr>
-            <p:cNvPr id="31" name="tx31"/>
+            <p:cNvPr id="40" name="tx40"/>
             <p:cNvSpPr/>
             <p:nvPr/>
           </p:nvSpPr>
           <p:spPr>
             <a:xfrm>
-              <a:off x="756929" y="2311117"/>
+              <a:off x="756929" y="2290318"/>
               <a:ext cx="79004" cy="101955"/>
             </a:xfrm>
             <a:prstGeom prst="rect">
@@ -4600,14 +4987,14 @@
         </p:sp>
         <p:sp>
           <p:nvSpPr>
-            <p:cNvPr id="32" name="tx32"/>
+            <p:cNvPr id="41" name="tx41"/>
             <p:cNvSpPr/>
             <p:nvPr/>
           </p:nvSpPr>
           <p:spPr>
             <a:xfrm>
-              <a:off x="2451993" y="5653245"/>
-              <a:ext cx="244784" cy="101955"/>
+              <a:off x="1598722" y="5693022"/>
+              <a:ext cx="205282" cy="101955"/>
             </a:xfrm>
             <a:prstGeom prst="rect">
               <a:avLst/>
@@ -4639,21 +5026,21 @@
                   <a:latin typeface="Helvetica"/>
                   <a:cs typeface="Helvetica"/>
                 </a:rPr>
-                <a:t>-0.2</a:t>
+                <a:t>-30</a:t>
               </a:r>
             </a:p>
           </p:txBody>
         </p:sp>
         <p:sp>
           <p:nvSpPr>
-            <p:cNvPr id="33" name="tx33"/>
+            <p:cNvPr id="42" name="tx42"/>
             <p:cNvSpPr/>
             <p:nvPr/>
           </p:nvSpPr>
           <p:spPr>
             <a:xfrm>
-              <a:off x="4221672" y="5653245"/>
-              <a:ext cx="197510" cy="101955"/>
+              <a:off x="2471744" y="5693022"/>
+              <a:ext cx="205282" cy="101955"/>
             </a:xfrm>
             <a:prstGeom prst="rect">
               <a:avLst/>
@@ -4685,21 +5072,21 @@
                   <a:latin typeface="Helvetica"/>
                   <a:cs typeface="Helvetica"/>
                 </a:rPr>
-                <a:t>0.0</a:t>
+                <a:t>-20</a:t>
               </a:r>
             </a:p>
           </p:txBody>
         </p:sp>
         <p:sp>
           <p:nvSpPr>
-            <p:cNvPr id="34" name="tx34"/>
+            <p:cNvPr id="43" name="tx43"/>
             <p:cNvSpPr/>
             <p:nvPr/>
           </p:nvSpPr>
           <p:spPr>
             <a:xfrm>
-              <a:off x="5967715" y="5653245"/>
-              <a:ext cx="197510" cy="101955"/>
+              <a:off x="3344765" y="5693022"/>
+              <a:ext cx="205282" cy="101955"/>
             </a:xfrm>
             <a:prstGeom prst="rect">
               <a:avLst/>
@@ -4731,21 +5118,21 @@
                   <a:latin typeface="Helvetica"/>
                   <a:cs typeface="Helvetica"/>
                 </a:rPr>
-                <a:t>0.2</a:t>
+                <a:t>-10</a:t>
               </a:r>
             </a:p>
           </p:txBody>
         </p:sp>
         <p:sp>
           <p:nvSpPr>
-            <p:cNvPr id="35" name="tx35"/>
+            <p:cNvPr id="44" name="tx44"/>
             <p:cNvSpPr/>
             <p:nvPr/>
           </p:nvSpPr>
           <p:spPr>
             <a:xfrm>
-              <a:off x="7713757" y="5653245"/>
-              <a:ext cx="197510" cy="101955"/>
+              <a:off x="4280925" y="5693022"/>
+              <a:ext cx="79004" cy="101955"/>
             </a:xfrm>
             <a:prstGeom prst="rect">
               <a:avLst/>
@@ -4777,21 +5164,205 @@
                   <a:latin typeface="Helvetica"/>
                   <a:cs typeface="Helvetica"/>
                 </a:rPr>
-                <a:t>0.4</a:t>
+                <a:t>0</a:t>
               </a:r>
             </a:p>
           </p:txBody>
         </p:sp>
         <p:sp>
           <p:nvSpPr>
-            <p:cNvPr id="36" name="tx36"/>
+            <p:cNvPr id="45" name="tx45"/>
             <p:cNvSpPr/>
             <p:nvPr/>
           </p:nvSpPr>
           <p:spPr>
             <a:xfrm>
-              <a:off x="2688337" y="5834415"/>
-              <a:ext cx="2138873" cy="127558"/>
+              <a:off x="5114445" y="5693022"/>
+              <a:ext cx="158008" cy="101955"/>
+            </a:xfrm>
+            <a:prstGeom prst="rect">
+              <a:avLst/>
+            </a:prstGeom>
+            <a:noFill/>
+          </p:spPr>
+          <p:txBody>
+            <a:bodyPr lIns="0" rIns="0" tIns="0" bIns="0" anchorCtr="1" anchor="ctr" wrap="none"/>
+            <a:lstStyle/>
+            <a:p>
+              <a:pPr algn="l" marL="0" marR="0" indent="0">
+                <a:lnSpc>
+                  <a:spcPts val="1120"/>
+                </a:lnSpc>
+                <a:spcBef>
+                  <a:spcPts val="0"/>
+                </a:spcBef>
+                <a:spcAft>
+                  <a:spcPts val="0"/>
+                </a:spcAft>
+              </a:pPr>
+              <a:r>
+                <a:rPr sz="1120">
+                  <a:solidFill>
+                    <a:srgbClr val="4D4D4D">
+                      <a:alpha val="100000"/>
+                    </a:srgbClr>
+                  </a:solidFill>
+                  <a:latin typeface="Helvetica"/>
+                  <a:cs typeface="Helvetica"/>
+                </a:rPr>
+                <a:t>10</a:t>
+              </a:r>
+            </a:p>
+          </p:txBody>
+        </p:sp>
+        <p:sp>
+          <p:nvSpPr>
+            <p:cNvPr id="46" name="tx46"/>
+            <p:cNvSpPr/>
+            <p:nvPr/>
+          </p:nvSpPr>
+          <p:spPr>
+            <a:xfrm>
+              <a:off x="5987466" y="5693022"/>
+              <a:ext cx="158008" cy="101955"/>
+            </a:xfrm>
+            <a:prstGeom prst="rect">
+              <a:avLst/>
+            </a:prstGeom>
+            <a:noFill/>
+          </p:spPr>
+          <p:txBody>
+            <a:bodyPr lIns="0" rIns="0" tIns="0" bIns="0" anchorCtr="1" anchor="ctr" wrap="none"/>
+            <a:lstStyle/>
+            <a:p>
+              <a:pPr algn="l" marL="0" marR="0" indent="0">
+                <a:lnSpc>
+                  <a:spcPts val="1120"/>
+                </a:lnSpc>
+                <a:spcBef>
+                  <a:spcPts val="0"/>
+                </a:spcBef>
+                <a:spcAft>
+                  <a:spcPts val="0"/>
+                </a:spcAft>
+              </a:pPr>
+              <a:r>
+                <a:rPr sz="1120">
+                  <a:solidFill>
+                    <a:srgbClr val="4D4D4D">
+                      <a:alpha val="100000"/>
+                    </a:srgbClr>
+                  </a:solidFill>
+                  <a:latin typeface="Helvetica"/>
+                  <a:cs typeface="Helvetica"/>
+                </a:rPr>
+                <a:t>20</a:t>
+              </a:r>
+            </a:p>
+          </p:txBody>
+        </p:sp>
+        <p:sp>
+          <p:nvSpPr>
+            <p:cNvPr id="47" name="tx47"/>
+            <p:cNvSpPr/>
+            <p:nvPr/>
+          </p:nvSpPr>
+          <p:spPr>
+            <a:xfrm>
+              <a:off x="6860487" y="5693022"/>
+              <a:ext cx="158008" cy="101955"/>
+            </a:xfrm>
+            <a:prstGeom prst="rect">
+              <a:avLst/>
+            </a:prstGeom>
+            <a:noFill/>
+          </p:spPr>
+          <p:txBody>
+            <a:bodyPr lIns="0" rIns="0" tIns="0" bIns="0" anchorCtr="1" anchor="ctr" wrap="none"/>
+            <a:lstStyle/>
+            <a:p>
+              <a:pPr algn="l" marL="0" marR="0" indent="0">
+                <a:lnSpc>
+                  <a:spcPts val="1120"/>
+                </a:lnSpc>
+                <a:spcBef>
+                  <a:spcPts val="0"/>
+                </a:spcBef>
+                <a:spcAft>
+                  <a:spcPts val="0"/>
+                </a:spcAft>
+              </a:pPr>
+              <a:r>
+                <a:rPr sz="1120">
+                  <a:solidFill>
+                    <a:srgbClr val="4D4D4D">
+                      <a:alpha val="100000"/>
+                    </a:srgbClr>
+                  </a:solidFill>
+                  <a:latin typeface="Helvetica"/>
+                  <a:cs typeface="Helvetica"/>
+                </a:rPr>
+                <a:t>30</a:t>
+              </a:r>
+            </a:p>
+          </p:txBody>
+        </p:sp>
+        <p:sp>
+          <p:nvSpPr>
+            <p:cNvPr id="48" name="tx48"/>
+            <p:cNvSpPr/>
+            <p:nvPr/>
+          </p:nvSpPr>
+          <p:spPr>
+            <a:xfrm>
+              <a:off x="7733508" y="5693022"/>
+              <a:ext cx="158008" cy="101955"/>
+            </a:xfrm>
+            <a:prstGeom prst="rect">
+              <a:avLst/>
+            </a:prstGeom>
+            <a:noFill/>
+          </p:spPr>
+          <p:txBody>
+            <a:bodyPr lIns="0" rIns="0" tIns="0" bIns="0" anchorCtr="1" anchor="ctr" wrap="none"/>
+            <a:lstStyle/>
+            <a:p>
+              <a:pPr algn="l" marL="0" marR="0" indent="0">
+                <a:lnSpc>
+                  <a:spcPts val="1120"/>
+                </a:lnSpc>
+                <a:spcBef>
+                  <a:spcPts val="0"/>
+                </a:spcBef>
+                <a:spcAft>
+                  <a:spcPts val="0"/>
+                </a:spcAft>
+              </a:pPr>
+              <a:r>
+                <a:rPr sz="1120">
+                  <a:solidFill>
+                    <a:srgbClr val="4D4D4D">
+                      <a:alpha val="100000"/>
+                    </a:srgbClr>
+                  </a:solidFill>
+                  <a:latin typeface="Helvetica"/>
+                  <a:cs typeface="Helvetica"/>
+                </a:rPr>
+                <a:t>40</a:t>
+              </a:r>
+            </a:p>
+          </p:txBody>
+        </p:sp>
+        <p:sp>
+          <p:nvSpPr>
+            <p:cNvPr id="49" name="tx49"/>
+            <p:cNvSpPr/>
+            <p:nvPr/>
+          </p:nvSpPr>
+          <p:spPr>
+            <a:xfrm>
+              <a:off x="3941888" y="5870717"/>
+              <a:ext cx="1630100" cy="127558"/>
             </a:xfrm>
             <a:prstGeom prst="rect">
               <a:avLst/>
@@ -4823,572 +5394,20 @@
                   <a:latin typeface="Helvetica"/>
                   <a:cs typeface="Helvetica"/>
                 </a:rPr>
-                <a:t>eGFR difference  =  (eGFR</a:t>
+                <a:t>eGFR difference (%)</a:t>
               </a:r>
             </a:p>
           </p:txBody>
         </p:sp>
         <p:sp>
           <p:nvSpPr>
-            <p:cNvPr id="37" name="tx37"/>
-            <p:cNvSpPr/>
-            <p:nvPr/>
-          </p:nvSpPr>
-          <p:spPr>
-            <a:xfrm>
-              <a:off x="4827210" y="5905308"/>
-              <a:ext cx="89885" cy="89245"/>
-            </a:xfrm>
-            <a:prstGeom prst="rect">
-              <a:avLst/>
-            </a:prstGeom>
-            <a:noFill/>
-          </p:spPr>
-          <p:txBody>
-            <a:bodyPr lIns="0" rIns="0" tIns="0" bIns="0" anchorCtr="1" anchor="ctr" wrap="none"/>
-            <a:lstStyle/>
-            <a:p>
-              <a:pPr algn="l" marL="0" marR="0" indent="0">
-                <a:lnSpc>
-                  <a:spcPts val="979"/>
-                </a:lnSpc>
-                <a:spcBef>
-                  <a:spcPts val="0"/>
-                </a:spcBef>
-                <a:spcAft>
-                  <a:spcPts val="0"/>
-                </a:spcAft>
-              </a:pPr>
-              <a:r>
-                <a:rPr sz="979">
-                  <a:solidFill>
-                    <a:srgbClr val="000000">
-                      <a:alpha val="100000"/>
-                    </a:srgbClr>
-                  </a:solidFill>
-                  <a:latin typeface="Helvetica"/>
-                  <a:cs typeface="Helvetica"/>
-                </a:rPr>
-                <a:t>C</a:t>
-              </a:r>
-            </a:p>
-          </p:txBody>
-        </p:sp>
-        <p:sp>
-          <p:nvSpPr>
-            <p:cNvPr id="38" name="tx38"/>
-            <p:cNvSpPr/>
-            <p:nvPr/>
-          </p:nvSpPr>
-          <p:spPr>
-            <a:xfrm>
-              <a:off x="4917095" y="5905308"/>
-              <a:ext cx="89885" cy="89245"/>
-            </a:xfrm>
-            <a:prstGeom prst="rect">
-              <a:avLst/>
-            </a:prstGeom>
-            <a:noFill/>
-          </p:spPr>
-          <p:txBody>
-            <a:bodyPr lIns="0" rIns="0" tIns="0" bIns="0" anchorCtr="1" anchor="ctr" wrap="none"/>
-            <a:lstStyle/>
-            <a:p>
-              <a:pPr algn="l" marL="0" marR="0" indent="0">
-                <a:lnSpc>
-                  <a:spcPts val="979"/>
-                </a:lnSpc>
-                <a:spcBef>
-                  <a:spcPts val="0"/>
-                </a:spcBef>
-                <a:spcAft>
-                  <a:spcPts val="0"/>
-                </a:spcAft>
-              </a:pPr>
-              <a:r>
-                <a:rPr sz="979">
-                  <a:solidFill>
-                    <a:srgbClr val="000000">
-                      <a:alpha val="100000"/>
-                    </a:srgbClr>
-                  </a:solidFill>
-                  <a:latin typeface="Helvetica"/>
-                  <a:cs typeface="Helvetica"/>
-                </a:rPr>
-                <a:t>R</a:t>
-              </a:r>
-            </a:p>
-          </p:txBody>
-        </p:sp>
-        <p:sp>
-          <p:nvSpPr>
-            <p:cNvPr id="39" name="tx39"/>
-            <p:cNvSpPr/>
-            <p:nvPr/>
-          </p:nvSpPr>
-          <p:spPr>
-            <a:xfrm>
-              <a:off x="5006981" y="5884826"/>
-              <a:ext cx="68305" cy="109728"/>
-            </a:xfrm>
-            <a:prstGeom prst="rect">
-              <a:avLst/>
-            </a:prstGeom>
-            <a:noFill/>
-          </p:spPr>
-          <p:txBody>
-            <a:bodyPr lIns="0" rIns="0" tIns="0" bIns="0" anchorCtr="1" anchor="ctr" wrap="none"/>
-            <a:lstStyle/>
-            <a:p>
-              <a:pPr algn="l" marL="0" marR="0" indent="0">
-                <a:lnSpc>
-                  <a:spcPts val="979"/>
-                </a:lnSpc>
-                <a:spcBef>
-                  <a:spcPts val="0"/>
-                </a:spcBef>
-                <a:spcAft>
-                  <a:spcPts val="0"/>
-                </a:spcAft>
-              </a:pPr>
-              <a:r>
-                <a:rPr sz="979">
-                  <a:solidFill>
-                    <a:srgbClr val="000000">
-                      <a:alpha val="100000"/>
-                    </a:srgbClr>
-                  </a:solidFill>
-                  <a:latin typeface="Symbol"/>
-                  <a:cs typeface="Symbol"/>
-                </a:rPr>
-                <a:t>−</a:t>
-              </a:r>
-            </a:p>
-          </p:txBody>
-        </p:sp>
-        <p:sp>
-          <p:nvSpPr>
-            <p:cNvPr id="40" name="tx40"/>
-            <p:cNvSpPr/>
-            <p:nvPr/>
-          </p:nvSpPr>
-          <p:spPr>
-            <a:xfrm>
-              <a:off x="5075286" y="5905308"/>
-              <a:ext cx="89885" cy="89245"/>
-            </a:xfrm>
-            <a:prstGeom prst="rect">
-              <a:avLst/>
-            </a:prstGeom>
-            <a:noFill/>
-          </p:spPr>
-          <p:txBody>
-            <a:bodyPr lIns="0" rIns="0" tIns="0" bIns="0" anchorCtr="1" anchor="ctr" wrap="none"/>
-            <a:lstStyle/>
-            <a:p>
-              <a:pPr algn="l" marL="0" marR="0" indent="0">
-                <a:lnSpc>
-                  <a:spcPts val="979"/>
-                </a:lnSpc>
-                <a:spcBef>
-                  <a:spcPts val="0"/>
-                </a:spcBef>
-                <a:spcAft>
-                  <a:spcPts val="0"/>
-                </a:spcAft>
-              </a:pPr>
-              <a:r>
-                <a:rPr sz="979">
-                  <a:solidFill>
-                    <a:srgbClr val="000000">
-                      <a:alpha val="100000"/>
-                    </a:srgbClr>
-                  </a:solidFill>
-                  <a:latin typeface="Helvetica"/>
-                  <a:cs typeface="Helvetica"/>
-                </a:rPr>
-                <a:t>C</a:t>
-              </a:r>
-            </a:p>
-          </p:txBody>
-        </p:sp>
-        <p:sp>
-          <p:nvSpPr>
-            <p:cNvPr id="41" name="tx41"/>
-            <p:cNvSpPr/>
-            <p:nvPr/>
-          </p:nvSpPr>
-          <p:spPr>
-            <a:xfrm>
-              <a:off x="5165172" y="5905308"/>
-              <a:ext cx="83027" cy="89245"/>
-            </a:xfrm>
-            <a:prstGeom prst="rect">
-              <a:avLst/>
-            </a:prstGeom>
-            <a:noFill/>
-          </p:spPr>
-          <p:txBody>
-            <a:bodyPr lIns="0" rIns="0" tIns="0" bIns="0" anchorCtr="1" anchor="ctr" wrap="none"/>
-            <a:lstStyle/>
-            <a:p>
-              <a:pPr algn="l" marL="0" marR="0" indent="0">
-                <a:lnSpc>
-                  <a:spcPts val="979"/>
-                </a:lnSpc>
-                <a:spcBef>
-                  <a:spcPts val="0"/>
-                </a:spcBef>
-                <a:spcAft>
-                  <a:spcPts val="0"/>
-                </a:spcAft>
-              </a:pPr>
-              <a:r>
-                <a:rPr sz="979">
-                  <a:solidFill>
-                    <a:srgbClr val="000000">
-                      <a:alpha val="100000"/>
-                    </a:srgbClr>
-                  </a:solidFill>
-                  <a:latin typeface="Helvetica"/>
-                  <a:cs typeface="Helvetica"/>
-                </a:rPr>
-                <a:t>Y</a:t>
-              </a:r>
-            </a:p>
-          </p:txBody>
-        </p:sp>
-        <p:sp>
-          <p:nvSpPr>
-            <p:cNvPr id="42" name="tx42"/>
-            <p:cNvSpPr/>
-            <p:nvPr/>
-          </p:nvSpPr>
-          <p:spPr>
-            <a:xfrm>
-              <a:off x="5248199" y="5905308"/>
-              <a:ext cx="83027" cy="89245"/>
-            </a:xfrm>
-            <a:prstGeom prst="rect">
-              <a:avLst/>
-            </a:prstGeom>
-            <a:noFill/>
-          </p:spPr>
-          <p:txBody>
-            <a:bodyPr lIns="0" rIns="0" tIns="0" bIns="0" anchorCtr="1" anchor="ctr" wrap="none"/>
-            <a:lstStyle/>
-            <a:p>
-              <a:pPr algn="l" marL="0" marR="0" indent="0">
-                <a:lnSpc>
-                  <a:spcPts val="979"/>
-                </a:lnSpc>
-                <a:spcBef>
-                  <a:spcPts val="0"/>
-                </a:spcBef>
-                <a:spcAft>
-                  <a:spcPts val="0"/>
-                </a:spcAft>
-              </a:pPr>
-              <a:r>
-                <a:rPr sz="979">
-                  <a:solidFill>
-                    <a:srgbClr val="000000">
-                      <a:alpha val="100000"/>
-                    </a:srgbClr>
-                  </a:solidFill>
-                  <a:latin typeface="Helvetica"/>
-                  <a:cs typeface="Helvetica"/>
-                </a:rPr>
-                <a:t>S</a:t>
-              </a:r>
-            </a:p>
-          </p:txBody>
-        </p:sp>
-        <p:sp>
-          <p:nvSpPr>
-            <p:cNvPr id="43" name="tx43"/>
-            <p:cNvSpPr/>
-            <p:nvPr/>
-          </p:nvSpPr>
-          <p:spPr>
-            <a:xfrm>
-              <a:off x="5331227" y="5834415"/>
-              <a:ext cx="558149" cy="127558"/>
-            </a:xfrm>
-            <a:prstGeom prst="rect">
-              <a:avLst/>
-            </a:prstGeom>
-            <a:noFill/>
-          </p:spPr>
-          <p:txBody>
-            <a:bodyPr lIns="0" rIns="0" tIns="0" bIns="0" anchorCtr="1" anchor="ctr" wrap="none"/>
-            <a:lstStyle/>
-            <a:p>
-              <a:pPr algn="l" marL="0" marR="0" indent="0">
-                <a:lnSpc>
-                  <a:spcPts val="1400"/>
-                </a:lnSpc>
-                <a:spcBef>
-                  <a:spcPts val="0"/>
-                </a:spcBef>
-                <a:spcAft>
-                  <a:spcPts val="0"/>
-                </a:spcAft>
-              </a:pPr>
-              <a:r>
-                <a:rPr sz="1400">
-                  <a:solidFill>
-                    <a:srgbClr val="000000">
-                      <a:alpha val="100000"/>
-                    </a:srgbClr>
-                  </a:solidFill>
-                  <a:latin typeface="Helvetica"/>
-                  <a:cs typeface="Helvetica"/>
-                </a:rPr>
-                <a:t> − CrCl</a:t>
-              </a:r>
-            </a:p>
-          </p:txBody>
-        </p:sp>
-        <p:sp>
-          <p:nvSpPr>
-            <p:cNvPr id="44" name="tx44"/>
-            <p:cNvSpPr/>
-            <p:nvPr/>
-          </p:nvSpPr>
-          <p:spPr>
-            <a:xfrm>
-              <a:off x="5889377" y="5905308"/>
-              <a:ext cx="89885" cy="89245"/>
-            </a:xfrm>
-            <a:prstGeom prst="rect">
-              <a:avLst/>
-            </a:prstGeom>
-            <a:noFill/>
-          </p:spPr>
-          <p:txBody>
-            <a:bodyPr lIns="0" rIns="0" tIns="0" bIns="0" anchorCtr="1" anchor="ctr" wrap="none"/>
-            <a:lstStyle/>
-            <a:p>
-              <a:pPr algn="l" marL="0" marR="0" indent="0">
-                <a:lnSpc>
-                  <a:spcPts val="979"/>
-                </a:lnSpc>
-                <a:spcBef>
-                  <a:spcPts val="0"/>
-                </a:spcBef>
-                <a:spcAft>
-                  <a:spcPts val="0"/>
-                </a:spcAft>
-              </a:pPr>
-              <a:r>
-                <a:rPr sz="979">
-                  <a:solidFill>
-                    <a:srgbClr val="000000">
-                      <a:alpha val="100000"/>
-                    </a:srgbClr>
-                  </a:solidFill>
-                  <a:latin typeface="Helvetica"/>
-                  <a:cs typeface="Helvetica"/>
-                </a:rPr>
-                <a:t>C</a:t>
-              </a:r>
-            </a:p>
-          </p:txBody>
-        </p:sp>
-        <p:sp>
-          <p:nvSpPr>
-            <p:cNvPr id="45" name="tx45"/>
-            <p:cNvSpPr/>
-            <p:nvPr/>
-          </p:nvSpPr>
-          <p:spPr>
-            <a:xfrm>
-              <a:off x="5979262" y="5905308"/>
-              <a:ext cx="96743" cy="89245"/>
-            </a:xfrm>
-            <a:prstGeom prst="rect">
-              <a:avLst/>
-            </a:prstGeom>
-            <a:noFill/>
-          </p:spPr>
-          <p:txBody>
-            <a:bodyPr lIns="0" rIns="0" tIns="0" bIns="0" anchorCtr="1" anchor="ctr" wrap="none"/>
-            <a:lstStyle/>
-            <a:p>
-              <a:pPr algn="l" marL="0" marR="0" indent="0">
-                <a:lnSpc>
-                  <a:spcPts val="979"/>
-                </a:lnSpc>
-                <a:spcBef>
-                  <a:spcPts val="0"/>
-                </a:spcBef>
-                <a:spcAft>
-                  <a:spcPts val="0"/>
-                </a:spcAft>
-              </a:pPr>
-              <a:r>
-                <a:rPr sz="979">
-                  <a:solidFill>
-                    <a:srgbClr val="000000">
-                      <a:alpha val="100000"/>
-                    </a:srgbClr>
-                  </a:solidFill>
-                  <a:latin typeface="Helvetica"/>
-                  <a:cs typeface="Helvetica"/>
-                </a:rPr>
-                <a:t>G</a:t>
-              </a:r>
-            </a:p>
-          </p:txBody>
-        </p:sp>
-        <p:sp>
-          <p:nvSpPr>
-            <p:cNvPr id="46" name="tx46"/>
-            <p:cNvSpPr/>
-            <p:nvPr/>
-          </p:nvSpPr>
-          <p:spPr>
-            <a:xfrm>
-              <a:off x="6076006" y="5834415"/>
-              <a:ext cx="562904" cy="127558"/>
-            </a:xfrm>
-            <a:prstGeom prst="rect">
-              <a:avLst/>
-            </a:prstGeom>
-            <a:noFill/>
-          </p:spPr>
-          <p:txBody>
-            <a:bodyPr lIns="0" rIns="0" tIns="0" bIns="0" anchorCtr="1" anchor="ctr" wrap="none"/>
-            <a:lstStyle/>
-            <a:p>
-              <a:pPr algn="l" marL="0" marR="0" indent="0">
-                <a:lnSpc>
-                  <a:spcPts val="1400"/>
-                </a:lnSpc>
-                <a:spcBef>
-                  <a:spcPts val="0"/>
-                </a:spcBef>
-                <a:spcAft>
-                  <a:spcPts val="0"/>
-                </a:spcAft>
-              </a:pPr>
-              <a:r>
-                <a:rPr sz="1400">
-                  <a:solidFill>
-                    <a:srgbClr val="000000">
-                      <a:alpha val="100000"/>
-                    </a:srgbClr>
-                  </a:solidFill>
-                  <a:latin typeface="Helvetica"/>
-                  <a:cs typeface="Helvetica"/>
-                </a:rPr>
-                <a:t>) / CrCl</a:t>
-              </a:r>
-            </a:p>
-          </p:txBody>
-        </p:sp>
-        <p:sp>
-          <p:nvSpPr>
-            <p:cNvPr id="47" name="tx47"/>
-            <p:cNvSpPr/>
-            <p:nvPr/>
-          </p:nvSpPr>
-          <p:spPr>
-            <a:xfrm>
-              <a:off x="6638910" y="5905308"/>
-              <a:ext cx="89885" cy="89245"/>
-            </a:xfrm>
-            <a:prstGeom prst="rect">
-              <a:avLst/>
-            </a:prstGeom>
-            <a:noFill/>
-          </p:spPr>
-          <p:txBody>
-            <a:bodyPr lIns="0" rIns="0" tIns="0" bIns="0" anchorCtr="1" anchor="ctr" wrap="none"/>
-            <a:lstStyle/>
-            <a:p>
-              <a:pPr algn="l" marL="0" marR="0" indent="0">
-                <a:lnSpc>
-                  <a:spcPts val="979"/>
-                </a:lnSpc>
-                <a:spcBef>
-                  <a:spcPts val="0"/>
-                </a:spcBef>
-                <a:spcAft>
-                  <a:spcPts val="0"/>
-                </a:spcAft>
-              </a:pPr>
-              <a:r>
-                <a:rPr sz="979">
-                  <a:solidFill>
-                    <a:srgbClr val="000000">
-                      <a:alpha val="100000"/>
-                    </a:srgbClr>
-                  </a:solidFill>
-                  <a:latin typeface="Helvetica"/>
-                  <a:cs typeface="Helvetica"/>
-                </a:rPr>
-                <a:t>C</a:t>
-              </a:r>
-            </a:p>
-          </p:txBody>
-        </p:sp>
-        <p:sp>
-          <p:nvSpPr>
-            <p:cNvPr id="48" name="tx48"/>
-            <p:cNvSpPr/>
-            <p:nvPr/>
-          </p:nvSpPr>
-          <p:spPr>
-            <a:xfrm>
-              <a:off x="6728796" y="5905308"/>
-              <a:ext cx="96743" cy="89245"/>
-            </a:xfrm>
-            <a:prstGeom prst="rect">
-              <a:avLst/>
-            </a:prstGeom>
-            <a:noFill/>
-          </p:spPr>
-          <p:txBody>
-            <a:bodyPr lIns="0" rIns="0" tIns="0" bIns="0" anchorCtr="1" anchor="ctr" wrap="none"/>
-            <a:lstStyle/>
-            <a:p>
-              <a:pPr algn="l" marL="0" marR="0" indent="0">
-                <a:lnSpc>
-                  <a:spcPts val="979"/>
-                </a:lnSpc>
-                <a:spcBef>
-                  <a:spcPts val="0"/>
-                </a:spcBef>
-                <a:spcAft>
-                  <a:spcPts val="0"/>
-                </a:spcAft>
-              </a:pPr>
-              <a:r>
-                <a:rPr sz="979">
-                  <a:solidFill>
-                    <a:srgbClr val="000000">
-                      <a:alpha val="100000"/>
-                    </a:srgbClr>
-                  </a:solidFill>
-                  <a:latin typeface="Helvetica"/>
-                  <a:cs typeface="Helvetica"/>
-                </a:rPr>
-                <a:t>G</a:t>
-              </a:r>
-            </a:p>
-          </p:txBody>
-        </p:sp>
-        <p:sp>
-          <p:nvSpPr>
-            <p:cNvPr id="49" name="tx49"/>
+            <p:cNvPr id="50" name="tx50"/>
             <p:cNvSpPr/>
             <p:nvPr/>
           </p:nvSpPr>
           <p:spPr>
             <a:xfrm rot="-5400000">
-              <a:off x="-37527" y="3827572"/>
+              <a:off x="-37527" y="3835619"/>
               <a:ext cx="1294150" cy="127558"/>
             </a:xfrm>
             <a:prstGeom prst="rect">
@@ -5428,14 +5447,14 @@
         </p:sp>
         <p:sp>
           <p:nvSpPr>
-            <p:cNvPr id="50" name="tx50"/>
+            <p:cNvPr id="51" name="tx51"/>
             <p:cNvSpPr/>
             <p:nvPr/>
           </p:nvSpPr>
           <p:spPr>
             <a:xfrm>
               <a:off x="915645" y="1977589"/>
-              <a:ext cx="5929701" cy="109362"/>
+              <a:ext cx="3712646" cy="91165"/>
             </a:xfrm>
             <a:prstGeom prst="rect">
               <a:avLst/>
@@ -5448,7 +5467,7 @@
             <a:p>
               <a:pPr algn="l" marL="0" marR="0" indent="0">
                 <a:lnSpc>
-                  <a:spcPts val="1200"/>
+                  <a:spcPts val="1000"/>
                 </a:lnSpc>
                 <a:spcBef>
                   <a:spcPts val="0"/>
@@ -5458,7 +5477,7 @@
                 </a:spcAft>
               </a:pPr>
               <a:r>
-                <a:rPr sz="1200">
+                <a:rPr sz="1000">
                   <a:solidFill>
                     <a:srgbClr val="404040">
                       <a:alpha val="100000"/>
@@ -5467,14 +5486,14 @@
                   <a:latin typeface="Helvetica"/>
                   <a:cs typeface="Helvetica"/>
                 </a:rPr>
-                <a:t>subHR = 0.41 (95% CI 0.22-0.76), p = 0.005   (per 0.1-unit increase in eGFR difference)</a:t>
+                <a:t>subHR = 2.47 (95% CI 1.32-4.60), p = 0.005   (per 10% decrease)</a:t>
               </a:r>
             </a:p>
           </p:txBody>
         </p:sp>
         <p:sp>
           <p:nvSpPr>
-            <p:cNvPr id="51" name="tx51"/>
+            <p:cNvPr id="52" name="tx52"/>
             <p:cNvSpPr/>
             <p:nvPr/>
           </p:nvSpPr>
